--- a/evaluation/dashboard/public/decks/uxl-onemath-maintainer-briefing.pptx
+++ b/evaluation/dashboard/public/decks/uxl-onemath-maintainer-briefing.pptx
@@ -2,20 +2,19 @@
 <file path=ppt/presentation.xml><?xml version="1.0" encoding="utf-8"?>
 <p:presentation xmlns:p="http://schemas.openxmlformats.org/presentationml/2006/main">
   <p:sldMasterIdLst>
-    <p:sldMasterId xmlns:r="http://schemas.openxmlformats.org/officeDocument/2006/relationships" id="2147483648" r:id="R846471b1b32245d1"/>
-    <p:sldMasterId xmlns:r="http://schemas.openxmlformats.org/officeDocument/2006/relationships" id="2147483665" r:id="R16c99ad07e2f4204"/>
+    <p:sldMasterId xmlns:r="http://schemas.openxmlformats.org/officeDocument/2006/relationships" id="2147483648" r:id="Rcc1eb1a49c4a4afc"/>
+    <p:sldMasterId xmlns:r="http://schemas.openxmlformats.org/officeDocument/2006/relationships" id="2147483665" r:id="R5cef3a8a603a46f5"/>
   </p:sldMasterIdLst>
   <p:notesMasterIdLst>
-    <p:notesMasterId xmlns:r="http://schemas.openxmlformats.org/officeDocument/2006/relationships" r:id="R4b3b8f16044f4c39"/>
+    <p:notesMasterId xmlns:r="http://schemas.openxmlformats.org/officeDocument/2006/relationships" r:id="R8c167993cca44b9d"/>
   </p:notesMasterIdLst>
   <p:sldIdLst>
-    <p:sldId xmlns:r="http://schemas.openxmlformats.org/officeDocument/2006/relationships" id="256" r:id="R9138d9bcde054032"/>
-    <p:sldId xmlns:r="http://schemas.openxmlformats.org/officeDocument/2006/relationships" id="257" r:id="R22bf5759cdbd4d8b"/>
-    <p:sldId xmlns:r="http://schemas.openxmlformats.org/officeDocument/2006/relationships" id="258" r:id="R1b0dc04206c247ee"/>
-    <p:sldId xmlns:r="http://schemas.openxmlformats.org/officeDocument/2006/relationships" id="259" r:id="R3fcb2e1411d54d3e"/>
-    <p:sldId xmlns:r="http://schemas.openxmlformats.org/officeDocument/2006/relationships" id="260" r:id="Ra346020d74c64ba3"/>
-    <p:sldId xmlns:r="http://schemas.openxmlformats.org/officeDocument/2006/relationships" id="261" r:id="R624ee2294d164ab8"/>
-    <p:sldId xmlns:r="http://schemas.openxmlformats.org/officeDocument/2006/relationships" id="262" r:id="R64a2e631b9e84a12"/>
+    <p:sldId xmlns:r="http://schemas.openxmlformats.org/officeDocument/2006/relationships" id="256" r:id="R0ef20cf0f7c640d7"/>
+    <p:sldId xmlns:r="http://schemas.openxmlformats.org/officeDocument/2006/relationships" id="257" r:id="R171f2aec1ee4488b"/>
+    <p:sldId xmlns:r="http://schemas.openxmlformats.org/officeDocument/2006/relationships" id="258" r:id="R6d93f807465f4283"/>
+    <p:sldId xmlns:r="http://schemas.openxmlformats.org/officeDocument/2006/relationships" id="259" r:id="Rda90a5160bb94c7e"/>
+    <p:sldId xmlns:r="http://schemas.openxmlformats.org/officeDocument/2006/relationships" id="260" r:id="R17d501ec78104af4"/>
+    <p:sldId xmlns:r="http://schemas.openxmlformats.org/officeDocument/2006/relationships" id="261" r:id="R4abd3f420951406c"/>
   </p:sldIdLst>
   <p:sldSz cx="12192000" cy="6858000"/>
   <p:notesSz cx="6858000" cy="9144000"/>
@@ -609,7 +608,7 @@
           </a:p>
           <a:p xmlns:a="http://schemas.openxmlformats.org/drawingml/2006/main">
             <a:r>
-              <a:t>Speaker cue: Why this is useful to oneMath at first glance</a:t>
+              <a:t>Speaker cue: What the skill tells an agent today</a:t>
             </a:r>
           </a:p>
         </p:txBody>
@@ -709,7 +708,7 @@
           </a:p>
           <a:p xmlns:a="http://schemas.openxmlformats.org/drawingml/2006/main">
             <a:r>
-              <a:t>Speaker cue: What the skill tells an agent today</a:t>
+              <a:t>Speaker cue: Evaluation inventory: 3 implemented, 3 targeted gaps</a:t>
             </a:r>
           </a:p>
         </p:txBody>
@@ -809,7 +808,7 @@
           </a:p>
           <a:p xmlns:a="http://schemas.openxmlformats.org/drawingml/2006/main">
             <a:r>
-              <a:t>Speaker cue: Evaluation inventory: 3 implemented, 3 targeted gaps</a:t>
+              <a:t>Speaker cue: How we chose the content</a:t>
             </a:r>
           </a:p>
         </p:txBody>
@@ -909,7 +908,7 @@
           </a:p>
           <a:p xmlns:a="http://schemas.openxmlformats.org/drawingml/2006/main">
             <a:r>
-              <a:t>Speaker cue: How we chose the content</a:t>
+              <a:t>Speaker cue: What project ownership would look like</a:t>
             </a:r>
           </a:p>
         </p:txBody>
@@ -940,106 +939,6 @@
 </file>
 
 <file path=ppt/notesSlides/notesSlide6.xml><?xml version="1.0" encoding="utf-8"?>
-<p:notes xmlns:p="http://schemas.openxmlformats.org/presentationml/2006/main">
-  <p:cSld>
-    <p:spTree>
-      <p:nvGrpSpPr>
-        <p:cNvPr id="1" name=""/>
-        <p:cNvGrpSpPr/>
-        <p:nvPr/>
-      </p:nvGrpSpPr>
-      <p:grpSpPr>
-        <a:xfrm xmlns:a="http://schemas.openxmlformats.org/drawingml/2006/main"/>
-      </p:grpSpPr>
-      <p:sp>
-        <p:nvSpPr>
-          <p:cNvPr id="2" name="Slide Image Placeholder 1"/>
-          <p:cNvSpPr>
-            <a:spLocks xmlns:a="http://schemas.openxmlformats.org/drawingml/2006/main" noGrp="1"/>
-          </p:cNvSpPr>
-          <p:nvPr>
-            <p:ph type="sldImg" idx="0"/>
-          </p:nvPr>
-        </p:nvSpPr>
-        <p:spPr/>
-      </p:sp>
-      <p:sp>
-        <p:nvSpPr>
-          <p:cNvPr id="3" name="Notes Placeholder 2"/>
-          <p:cNvSpPr>
-            <a:spLocks xmlns:a="http://schemas.openxmlformats.org/drawingml/2006/main" noGrp="1"/>
-          </p:cNvSpPr>
-          <p:nvPr>
-            <p:ph type="body" idx="1"/>
-          </p:nvPr>
-        </p:nvSpPr>
-        <p:spPr/>
-        <p:txBody>
-          <a:bodyPr xmlns:a="http://schemas.openxmlformats.org/drawingml/2006/main"/>
-          <a:lstStyle xmlns:a="http://schemas.openxmlformats.org/drawingml/2006/main"/>
-          <a:p xmlns:a="http://schemas.openxmlformats.org/drawingml/2006/main">
-            <a:r>
-              <a:t>[Sources]</a:t>
-            </a:r>
-          </a:p>
-          <a:p xmlns:a="http://schemas.openxmlformats.org/drawingml/2006/main">
-            <a:r>
-              <a:t>- https://github.com/uxlfoundation/skills/tree/main/skills/uxl-onemath</a:t>
-            </a:r>
-          </a:p>
-          <a:p xmlns:a="http://schemas.openxmlformats.org/drawingml/2006/main">
-            <a:r>
-              <a:t>- https://github.com/uxlfoundation/skills/blob/main/skill-cards/uxl-onemath.md</a:t>
-            </a:r>
-          </a:p>
-          <a:p xmlns:a="http://schemas.openxmlformats.org/drawingml/2006/main">
-            <a:r>
-              <a:t>- https://github.com/uxlfoundation/skills/blob/main/evaluation/harbor/suites.json</a:t>
-            </a:r>
-          </a:p>
-          <a:p xmlns:a="http://schemas.openxmlformats.org/drawingml/2006/main">
-            <a:r>
-              <a:t>[/Sources]</a:t>
-            </a:r>
-          </a:p>
-          <a:p xmlns:a="http://schemas.openxmlformats.org/drawingml/2006/main">
-            <a:r>
-              <a:t/>
-            </a:r>
-          </a:p>
-          <a:p xmlns:a="http://schemas.openxmlformats.org/drawingml/2006/main">
-            <a:r>
-              <a:t>Speaker cue: What project ownership would look like</a:t>
-            </a:r>
-          </a:p>
-        </p:txBody>
-      </p:sp>
-      <p:sp>
-        <p:nvSpPr>
-          <p:cNvPr id="4" name="Slide Number Placeholder 3"/>
-          <p:cNvSpPr>
-            <a:spLocks xmlns:a="http://schemas.openxmlformats.org/drawingml/2006/main" noGrp="1"/>
-          </p:cNvSpPr>
-          <p:nvPr>
-            <p:ph type="sldNum" idx="5"/>
-          </p:nvPr>
-        </p:nvSpPr>
-        <p:spPr/>
-        <p:txBody>
-          <a:bodyPr xmlns:a="http://schemas.openxmlformats.org/drawingml/2006/main"/>
-          <a:lstStyle xmlns:a="http://schemas.openxmlformats.org/drawingml/2006/main"/>
-          <a:p xmlns:a="http://schemas.openxmlformats.org/drawingml/2006/main"/>
-        </p:txBody>
-      </p:sp>
-    </p:spTree>
-  </p:cSld>
-  <p:clrMapOvr>
-    <a:masterClrMapping xmlns:a="http://schemas.openxmlformats.org/drawingml/2006/main"/>
-  </p:clrMapOvr>
-</p:notes>
-</file>
-
-<file path=ppt/notesSlides/notesSlide7.xml><?xml version="1.0" encoding="utf-8"?>
 <p:notes xmlns:p="http://schemas.openxmlformats.org/presentationml/2006/main">
   <p:cSld>
     <p:spTree>
@@ -1145,7 +1044,7 @@
     <p:bg>
       <p:bgPr>
         <a:blipFill xmlns:a="http://schemas.openxmlformats.org/drawingml/2006/main">
-          <a:blip xmlns:r="http://schemas.openxmlformats.org/officeDocument/2006/relationships" r:embed="Re04871bacaf44e7d">
+          <a:blip xmlns:r="http://schemas.openxmlformats.org/officeDocument/2006/relationships" r:embed="R184fe0e243664efa">
             <a:alphaModFix/>
           </a:blip>
           <a:stretch>
@@ -1580,7 +1479,7 @@
           <p:nvPr/>
         </p:nvPicPr>
         <p:blipFill rotWithShape="1">
-          <a:blip xmlns:r="http://schemas.openxmlformats.org/officeDocument/2006/relationships" xmlns:a="http://schemas.openxmlformats.org/drawingml/2006/main" r:embed="Ree2509adb7b64ce8">
+          <a:blip xmlns:r="http://schemas.openxmlformats.org/officeDocument/2006/relationships" xmlns:a="http://schemas.openxmlformats.org/drawingml/2006/main" r:embed="R986810c48c14495a">
             <a:alphaModFix/>
           </a:blip>
           <a:srcRect xmlns:a="http://schemas.openxmlformats.org/drawingml/2006/main" l="0" t="0" r="0" b="0"/>
@@ -1610,7 +1509,7 @@
     <p:bg>
       <p:bgPr>
         <a:blipFill xmlns:a="http://schemas.openxmlformats.org/drawingml/2006/main">
-          <a:blip xmlns:r="http://schemas.openxmlformats.org/officeDocument/2006/relationships" r:embed="Rba02fd62823f4a0d">
+          <a:blip xmlns:r="http://schemas.openxmlformats.org/officeDocument/2006/relationships" r:embed="R776fa131e6a44147">
             <a:alphaModFix/>
           </a:blip>
           <a:stretch>
@@ -2644,7 +2543,7 @@
           <p:nvPr/>
         </p:nvPicPr>
         <p:blipFill rotWithShape="1">
-          <a:blip xmlns:r="http://schemas.openxmlformats.org/officeDocument/2006/relationships" xmlns:a="http://schemas.openxmlformats.org/drawingml/2006/main" r:embed="R96b74d5640be458c">
+          <a:blip xmlns:r="http://schemas.openxmlformats.org/officeDocument/2006/relationships" xmlns:a="http://schemas.openxmlformats.org/drawingml/2006/main" r:embed="Rbcc85aad1a6a457b">
             <a:alphaModFix/>
           </a:blip>
           <a:srcRect xmlns:a="http://schemas.openxmlformats.org/drawingml/2006/main" l="0" t="0" r="0" b="0"/>
@@ -3668,7 +3567,7 @@
           <p:nvPr/>
         </p:nvPicPr>
         <p:blipFill rotWithShape="1">
-          <a:blip xmlns:r="http://schemas.openxmlformats.org/officeDocument/2006/relationships" xmlns:a="http://schemas.openxmlformats.org/drawingml/2006/main" r:embed="Rd748f2eb499044e1">
+          <a:blip xmlns:r="http://schemas.openxmlformats.org/officeDocument/2006/relationships" xmlns:a="http://schemas.openxmlformats.org/drawingml/2006/main" r:embed="R93c191434ba44b93">
             <a:alphaModFix/>
           </a:blip>
           <a:srcRect xmlns:a="http://schemas.openxmlformats.org/drawingml/2006/main" l="0" t="0" r="0" b="0"/>
@@ -3698,7 +3597,7 @@
     <p:bg>
       <p:bgPr>
         <a:blipFill xmlns:a="http://schemas.openxmlformats.org/drawingml/2006/main">
-          <a:blip xmlns:r="http://schemas.openxmlformats.org/officeDocument/2006/relationships" r:embed="R8767f226763048e2">
+          <a:blip xmlns:r="http://schemas.openxmlformats.org/officeDocument/2006/relationships" r:embed="R87e2f2d8a18149e1">
             <a:alphaModFix/>
           </a:blip>
           <a:stretch>
@@ -4972,7 +4871,7 @@
           <p:nvPr/>
         </p:nvPicPr>
         <p:blipFill rotWithShape="1">
-          <a:blip xmlns:r="http://schemas.openxmlformats.org/officeDocument/2006/relationships" xmlns:a="http://schemas.openxmlformats.org/drawingml/2006/main" r:embed="R8c85dd38a5194c20">
+          <a:blip xmlns:r="http://schemas.openxmlformats.org/officeDocument/2006/relationships" xmlns:a="http://schemas.openxmlformats.org/drawingml/2006/main" r:embed="R08e6e017dfcd42a6">
             <a:alphaModFix/>
           </a:blip>
           <a:srcRect xmlns:a="http://schemas.openxmlformats.org/drawingml/2006/main" l="0" t="0" r="0" b="0"/>
@@ -8216,7 +8115,7 @@
           <p:nvPr/>
         </p:nvPicPr>
         <p:blipFill rotWithShape="1">
-          <a:blip xmlns:r="http://schemas.openxmlformats.org/officeDocument/2006/relationships" xmlns:a="http://schemas.openxmlformats.org/drawingml/2006/main" r:embed="R2cbc22e9b7424a88">
+          <a:blip xmlns:r="http://schemas.openxmlformats.org/officeDocument/2006/relationships" xmlns:a="http://schemas.openxmlformats.org/drawingml/2006/main" r:embed="R144115705fd148c7">
             <a:alphaModFix/>
           </a:blip>
           <a:srcRect xmlns:a="http://schemas.openxmlformats.org/drawingml/2006/main" l="0" t="0" r="0" b="0"/>
@@ -9954,7 +9853,7 @@
           <p:nvPr/>
         </p:nvPicPr>
         <p:blipFill rotWithShape="1">
-          <a:blip xmlns:r="http://schemas.openxmlformats.org/officeDocument/2006/relationships" xmlns:a="http://schemas.openxmlformats.org/drawingml/2006/main" r:embed="Rf52487711c0f4393">
+          <a:blip xmlns:r="http://schemas.openxmlformats.org/officeDocument/2006/relationships" xmlns:a="http://schemas.openxmlformats.org/drawingml/2006/main" r:embed="R1e995081f6f74cd0">
             <a:alphaModFix/>
           </a:blip>
           <a:srcRect xmlns:a="http://schemas.openxmlformats.org/drawingml/2006/main" l="0" t="0" r="0" b="0"/>
@@ -16783,7 +16682,7 @@
     <p:bg>
       <p:bgPr>
         <a:blipFill xmlns:a="http://schemas.openxmlformats.org/drawingml/2006/main">
-          <a:blip xmlns:r="http://schemas.openxmlformats.org/officeDocument/2006/relationships" r:embed="Rcf2cfd16fca1476e">
+          <a:blip xmlns:r="http://schemas.openxmlformats.org/officeDocument/2006/relationships" r:embed="R073ebc3963e9444c">
             <a:alphaModFix/>
           </a:blip>
           <a:stretch>
@@ -17218,7 +17117,7 @@
           <p:nvPr/>
         </p:nvPicPr>
         <p:blipFill rotWithShape="1">
-          <a:blip xmlns:r="http://schemas.openxmlformats.org/officeDocument/2006/relationships" xmlns:a="http://schemas.openxmlformats.org/drawingml/2006/main" r:embed="R130275da88ab4bb0">
+          <a:blip xmlns:r="http://schemas.openxmlformats.org/officeDocument/2006/relationships" xmlns:a="http://schemas.openxmlformats.org/drawingml/2006/main" r:embed="Ra5004691d3494e60">
             <a:alphaModFix/>
           </a:blip>
           <a:srcRect xmlns:a="http://schemas.openxmlformats.org/drawingml/2006/main" l="0" t="0" r="0" b="0"/>
@@ -17248,7 +17147,7 @@
     <p:bg>
       <p:bgPr>
         <a:blipFill xmlns:a="http://schemas.openxmlformats.org/drawingml/2006/main">
-          <a:blip xmlns:r="http://schemas.openxmlformats.org/officeDocument/2006/relationships" r:embed="R9a5bb31a29cf4101">
+          <a:blip xmlns:r="http://schemas.openxmlformats.org/officeDocument/2006/relationships" r:embed="Rdaae93f5e9134aed">
             <a:alphaModFix/>
           </a:blip>
           <a:stretch>
@@ -17881,7 +17780,7 @@
           <p:nvPr/>
         </p:nvPicPr>
         <p:blipFill rotWithShape="1">
-          <a:blip xmlns:r="http://schemas.openxmlformats.org/officeDocument/2006/relationships" xmlns:a="http://schemas.openxmlformats.org/drawingml/2006/main" r:embed="R8c606d30fa5143a2">
+          <a:blip xmlns:r="http://schemas.openxmlformats.org/officeDocument/2006/relationships" xmlns:a="http://schemas.openxmlformats.org/drawingml/2006/main" r:embed="Rd72ea5376fe14feb">
             <a:alphaModFix/>
           </a:blip>
           <a:srcRect xmlns:a="http://schemas.openxmlformats.org/drawingml/2006/main" l="0" t="0" r="0" b="0"/>
@@ -18341,7 +18240,7 @@
     <p:bg>
       <p:bgPr>
         <a:blipFill xmlns:a="http://schemas.openxmlformats.org/drawingml/2006/main">
-          <a:blip xmlns:r="http://schemas.openxmlformats.org/officeDocument/2006/relationships" r:embed="R4a90724d60234a37">
+          <a:blip xmlns:r="http://schemas.openxmlformats.org/officeDocument/2006/relationships" r:embed="Rff4746025dc0422a">
             <a:alphaModFix/>
           </a:blip>
           <a:stretch>
@@ -18974,7 +18873,7 @@
           <p:nvPr/>
         </p:nvPicPr>
         <p:blipFill rotWithShape="1">
-          <a:blip xmlns:r="http://schemas.openxmlformats.org/officeDocument/2006/relationships" xmlns:a="http://schemas.openxmlformats.org/drawingml/2006/main" r:embed="Rc4a133c7d0e34074">
+          <a:blip xmlns:r="http://schemas.openxmlformats.org/officeDocument/2006/relationships" xmlns:a="http://schemas.openxmlformats.org/drawingml/2006/main" r:embed="R316198f654994425">
             <a:alphaModFix/>
           </a:blip>
           <a:srcRect xmlns:a="http://schemas.openxmlformats.org/drawingml/2006/main" l="0" t="0" r="0" b="0"/>
@@ -21630,7 +21529,7 @@
           <p:nvPr/>
         </p:nvPicPr>
         <p:blipFill rotWithShape="1">
-          <a:blip xmlns:r="http://schemas.openxmlformats.org/officeDocument/2006/relationships" xmlns:a="http://schemas.openxmlformats.org/drawingml/2006/main" r:embed="R48df7a380f4f4e35">
+          <a:blip xmlns:r="http://schemas.openxmlformats.org/officeDocument/2006/relationships" xmlns:a="http://schemas.openxmlformats.org/drawingml/2006/main" r:embed="R00b46485208e42fc">
             <a:alphaModFix/>
           </a:blip>
           <a:srcRect xmlns:a="http://schemas.openxmlformats.org/drawingml/2006/main" l="0" t="0" r="0" b="0"/>
@@ -21660,7 +21559,7 @@
     <p:bg>
       <p:bgPr>
         <a:blipFill xmlns:a="http://schemas.openxmlformats.org/drawingml/2006/main">
-          <a:blip xmlns:r="http://schemas.openxmlformats.org/officeDocument/2006/relationships" r:embed="R3e52722b809647a9">
+          <a:blip xmlns:r="http://schemas.openxmlformats.org/officeDocument/2006/relationships" r:embed="R564fd0f15e5c499d">
             <a:alphaModFix/>
           </a:blip>
           <a:stretch>
@@ -22504,7 +22403,7 @@
           <p:nvPr/>
         </p:nvPicPr>
         <p:blipFill rotWithShape="1">
-          <a:blip xmlns:r="http://schemas.openxmlformats.org/officeDocument/2006/relationships" xmlns:a="http://schemas.openxmlformats.org/drawingml/2006/main" r:embed="R8f1422d8eb1d49b1">
+          <a:blip xmlns:r="http://schemas.openxmlformats.org/officeDocument/2006/relationships" xmlns:a="http://schemas.openxmlformats.org/drawingml/2006/main" r:embed="R196ea756aa334ce7">
             <a:alphaModFix/>
           </a:blip>
           <a:srcRect xmlns:a="http://schemas.openxmlformats.org/drawingml/2006/main" l="0" t="0" r="0" b="0"/>
@@ -22534,7 +22433,7 @@
     <p:bg>
       <p:bgPr>
         <a:blipFill xmlns:a="http://schemas.openxmlformats.org/drawingml/2006/main">
-          <a:blip xmlns:r="http://schemas.openxmlformats.org/officeDocument/2006/relationships" r:embed="R1e10915f55304b6c">
+          <a:blip xmlns:r="http://schemas.openxmlformats.org/officeDocument/2006/relationships" r:embed="Racbaf91e8cde49d9">
             <a:alphaModFix/>
           </a:blip>
           <a:stretch>
@@ -23482,7 +23381,7 @@
           <p:nvPr/>
         </p:nvPicPr>
         <p:blipFill rotWithShape="1">
-          <a:blip xmlns:r="http://schemas.openxmlformats.org/officeDocument/2006/relationships" xmlns:a="http://schemas.openxmlformats.org/drawingml/2006/main" r:embed="Rb374828d076a4ae9">
+          <a:blip xmlns:r="http://schemas.openxmlformats.org/officeDocument/2006/relationships" xmlns:a="http://schemas.openxmlformats.org/drawingml/2006/main" r:embed="Rd331f8ede9b24945">
             <a:alphaModFix/>
           </a:blip>
           <a:srcRect xmlns:a="http://schemas.openxmlformats.org/drawingml/2006/main" l="0" t="0" r="0" b="0"/>
@@ -23512,7 +23411,7 @@
     <p:bg>
       <p:bgPr>
         <a:blipFill xmlns:a="http://schemas.openxmlformats.org/drawingml/2006/main">
-          <a:blip xmlns:r="http://schemas.openxmlformats.org/officeDocument/2006/relationships" r:embed="R7aebb99ca68a4759">
+          <a:blip xmlns:r="http://schemas.openxmlformats.org/officeDocument/2006/relationships" r:embed="Rf53d4676005f49a5">
             <a:alphaModFix/>
           </a:blip>
           <a:stretch>
@@ -23973,7 +23872,7 @@
           <p:nvPr/>
         </p:nvPicPr>
         <p:blipFill rotWithShape="1">
-          <a:blip xmlns:r="http://schemas.openxmlformats.org/officeDocument/2006/relationships" xmlns:a="http://schemas.openxmlformats.org/drawingml/2006/main" r:embed="R9892939ef298410a">
+          <a:blip xmlns:r="http://schemas.openxmlformats.org/officeDocument/2006/relationships" xmlns:a="http://schemas.openxmlformats.org/drawingml/2006/main" r:embed="Rb0739c16f94344fb">
             <a:alphaModFix/>
           </a:blip>
           <a:srcRect xmlns:a="http://schemas.openxmlformats.org/drawingml/2006/main" l="0" t="0" r="0" b="0"/>
@@ -25685,22 +25584,22 @@
   </p:cSld>
   <p:clrMap bg1="lt1" tx1="dk1" bg2="dk2" tx2="lt2" accent1="accent1" accent2="accent2" accent3="accent3" accent4="accent4" accent5="accent5" accent6="accent6" hlink="hlink" folHlink="folHlink"/>
   <p:sldLayoutIdLst>
-    <p:sldLayoutId xmlns:r="http://schemas.openxmlformats.org/officeDocument/2006/relationships" id="2147483649" r:id="Rfc211a4a9183494f"/>
-    <p:sldLayoutId xmlns:r="http://schemas.openxmlformats.org/officeDocument/2006/relationships" id="2147483650" r:id="Rbcde1b4c296c4b21"/>
-    <p:sldLayoutId xmlns:r="http://schemas.openxmlformats.org/officeDocument/2006/relationships" id="2147483651" r:id="R354070509fb04fb2"/>
-    <p:sldLayoutId xmlns:r="http://schemas.openxmlformats.org/officeDocument/2006/relationships" id="2147483652" r:id="Rfc8968cf309f4f6c"/>
-    <p:sldLayoutId xmlns:r="http://schemas.openxmlformats.org/officeDocument/2006/relationships" id="2147483653" r:id="R7def813c468c4564"/>
-    <p:sldLayoutId xmlns:r="http://schemas.openxmlformats.org/officeDocument/2006/relationships" id="2147483654" r:id="Rddcdc76a012e4cca"/>
-    <p:sldLayoutId xmlns:r="http://schemas.openxmlformats.org/officeDocument/2006/relationships" id="2147483655" r:id="R452ecd41c61247ed"/>
-    <p:sldLayoutId xmlns:r="http://schemas.openxmlformats.org/officeDocument/2006/relationships" id="2147483656" r:id="Rc9e3789f17a14c5a"/>
-    <p:sldLayoutId xmlns:r="http://schemas.openxmlformats.org/officeDocument/2006/relationships" id="2147483657" r:id="Re97deef038e94f81"/>
-    <p:sldLayoutId xmlns:r="http://schemas.openxmlformats.org/officeDocument/2006/relationships" id="2147483658" r:id="Rd450ac20d86e46f9"/>
-    <p:sldLayoutId xmlns:r="http://schemas.openxmlformats.org/officeDocument/2006/relationships" id="2147483659" r:id="R8ae8c4d9ac2f44ef"/>
-    <p:sldLayoutId xmlns:r="http://schemas.openxmlformats.org/officeDocument/2006/relationships" id="2147483660" r:id="R93206e7f34a74f61"/>
-    <p:sldLayoutId xmlns:r="http://schemas.openxmlformats.org/officeDocument/2006/relationships" id="2147483661" r:id="Rc1d8139903424ff5"/>
-    <p:sldLayoutId xmlns:r="http://schemas.openxmlformats.org/officeDocument/2006/relationships" id="2147483662" r:id="R662ce5afb9ad48cb"/>
-    <p:sldLayoutId xmlns:r="http://schemas.openxmlformats.org/officeDocument/2006/relationships" id="2147483663" r:id="R9f57a74cd7a9464c"/>
-    <p:sldLayoutId xmlns:r="http://schemas.openxmlformats.org/officeDocument/2006/relationships" id="2147483664" r:id="R6396f92466914517"/>
+    <p:sldLayoutId xmlns:r="http://schemas.openxmlformats.org/officeDocument/2006/relationships" id="2147483649" r:id="Rb09275d15591411d"/>
+    <p:sldLayoutId xmlns:r="http://schemas.openxmlformats.org/officeDocument/2006/relationships" id="2147483650" r:id="Rb2f96146277a4c1a"/>
+    <p:sldLayoutId xmlns:r="http://schemas.openxmlformats.org/officeDocument/2006/relationships" id="2147483651" r:id="R123c9529061143c0"/>
+    <p:sldLayoutId xmlns:r="http://schemas.openxmlformats.org/officeDocument/2006/relationships" id="2147483652" r:id="R64c0d7a3e3b04dd4"/>
+    <p:sldLayoutId xmlns:r="http://schemas.openxmlformats.org/officeDocument/2006/relationships" id="2147483653" r:id="R2e87b66af58d4aad"/>
+    <p:sldLayoutId xmlns:r="http://schemas.openxmlformats.org/officeDocument/2006/relationships" id="2147483654" r:id="R1d637294cdd44caf"/>
+    <p:sldLayoutId xmlns:r="http://schemas.openxmlformats.org/officeDocument/2006/relationships" id="2147483655" r:id="R2bb395a484574f5b"/>
+    <p:sldLayoutId xmlns:r="http://schemas.openxmlformats.org/officeDocument/2006/relationships" id="2147483656" r:id="R5ac30d5c2cc54385"/>
+    <p:sldLayoutId xmlns:r="http://schemas.openxmlformats.org/officeDocument/2006/relationships" id="2147483657" r:id="R78c11ffc1a894024"/>
+    <p:sldLayoutId xmlns:r="http://schemas.openxmlformats.org/officeDocument/2006/relationships" id="2147483658" r:id="R6d7236c306df4bfc"/>
+    <p:sldLayoutId xmlns:r="http://schemas.openxmlformats.org/officeDocument/2006/relationships" id="2147483659" r:id="R4c6cb3d0d6df4637"/>
+    <p:sldLayoutId xmlns:r="http://schemas.openxmlformats.org/officeDocument/2006/relationships" id="2147483660" r:id="R94bdd73bde32474c"/>
+    <p:sldLayoutId xmlns:r="http://schemas.openxmlformats.org/officeDocument/2006/relationships" id="2147483661" r:id="R524213cb4faf4f90"/>
+    <p:sldLayoutId xmlns:r="http://schemas.openxmlformats.org/officeDocument/2006/relationships" id="2147483662" r:id="R25b721e1f4044c22"/>
+    <p:sldLayoutId xmlns:r="http://schemas.openxmlformats.org/officeDocument/2006/relationships" id="2147483663" r:id="Rac2776345ebc42ab"/>
+    <p:sldLayoutId xmlns:r="http://schemas.openxmlformats.org/officeDocument/2006/relationships" id="2147483664" r:id="R930176a12a854fe9"/>
   </p:sldLayoutIdLst>
   <p:hf hdr="0" ftr="0" dt="0"/>
   <p:txStyles>
@@ -27893,7 +27792,7 @@
           <p:nvPr/>
         </p:nvPicPr>
         <p:blipFill rotWithShape="1">
-          <a:blip xmlns:r="http://schemas.openxmlformats.org/officeDocument/2006/relationships" xmlns:a="http://schemas.openxmlformats.org/drawingml/2006/main" r:embed="Re1112c6a35f14ed8">
+          <a:blip xmlns:r="http://schemas.openxmlformats.org/officeDocument/2006/relationships" xmlns:a="http://schemas.openxmlformats.org/drawingml/2006/main" r:embed="Re0782dc3bc3f45e3">
             <a:alphaModFix/>
           </a:blip>
           <a:srcRect xmlns:a="http://schemas.openxmlformats.org/drawingml/2006/main" l="0" t="0" r="0" b="0"/>
@@ -27916,19 +27815,19 @@
   </p:cSld>
   <p:clrMap bg1="lt1" tx1="dk1" bg2="dk2" tx2="lt2" accent1="accent1" accent2="accent2" accent3="accent3" accent4="accent4" accent5="accent5" accent6="accent6" hlink="hlink" folHlink="folHlink"/>
   <p:sldLayoutIdLst>
-    <p:sldLayoutId xmlns:r="http://schemas.openxmlformats.org/officeDocument/2006/relationships" id="2147483666" r:id="R3c9f398c1dd44e7d"/>
-    <p:sldLayoutId xmlns:r="http://schemas.openxmlformats.org/officeDocument/2006/relationships" id="2147483667" r:id="Re95000da74604257"/>
-    <p:sldLayoutId xmlns:r="http://schemas.openxmlformats.org/officeDocument/2006/relationships" id="2147483668" r:id="Rd9d21cdc48f54840"/>
-    <p:sldLayoutId xmlns:r="http://schemas.openxmlformats.org/officeDocument/2006/relationships" id="2147483669" r:id="Rda0ac56a42a5479b"/>
-    <p:sldLayoutId xmlns:r="http://schemas.openxmlformats.org/officeDocument/2006/relationships" id="2147483670" r:id="R13c663dd0b564d97"/>
-    <p:sldLayoutId xmlns:r="http://schemas.openxmlformats.org/officeDocument/2006/relationships" id="2147483671" r:id="Raf7f229089f64af1"/>
-    <p:sldLayoutId xmlns:r="http://schemas.openxmlformats.org/officeDocument/2006/relationships" id="2147483672" r:id="Rf234d06cfae744d1"/>
-    <p:sldLayoutId xmlns:r="http://schemas.openxmlformats.org/officeDocument/2006/relationships" id="2147483673" r:id="Rdcc8a28baa9c455e"/>
-    <p:sldLayoutId xmlns:r="http://schemas.openxmlformats.org/officeDocument/2006/relationships" id="2147483674" r:id="R814250efdbaf4f73"/>
-    <p:sldLayoutId xmlns:r="http://schemas.openxmlformats.org/officeDocument/2006/relationships" id="2147483675" r:id="Rdebaf5a8383a4321"/>
-    <p:sldLayoutId xmlns:r="http://schemas.openxmlformats.org/officeDocument/2006/relationships" id="2147483676" r:id="Rf1af8e439588406c"/>
-    <p:sldLayoutId xmlns:r="http://schemas.openxmlformats.org/officeDocument/2006/relationships" id="2147483677" r:id="R719b33d6be4b475f"/>
-    <p:sldLayoutId xmlns:r="http://schemas.openxmlformats.org/officeDocument/2006/relationships" id="2147483678" r:id="Rda10205655674640"/>
+    <p:sldLayoutId xmlns:r="http://schemas.openxmlformats.org/officeDocument/2006/relationships" id="2147483666" r:id="Rb8bcd3a0793348c3"/>
+    <p:sldLayoutId xmlns:r="http://schemas.openxmlformats.org/officeDocument/2006/relationships" id="2147483667" r:id="R8ad059756b7248e6"/>
+    <p:sldLayoutId xmlns:r="http://schemas.openxmlformats.org/officeDocument/2006/relationships" id="2147483668" r:id="Rbba842c734a84527"/>
+    <p:sldLayoutId xmlns:r="http://schemas.openxmlformats.org/officeDocument/2006/relationships" id="2147483669" r:id="Rc332e68f085341fa"/>
+    <p:sldLayoutId xmlns:r="http://schemas.openxmlformats.org/officeDocument/2006/relationships" id="2147483670" r:id="R3a8808ce588f4103"/>
+    <p:sldLayoutId xmlns:r="http://schemas.openxmlformats.org/officeDocument/2006/relationships" id="2147483671" r:id="R9e0d3fef2b5b4655"/>
+    <p:sldLayoutId xmlns:r="http://schemas.openxmlformats.org/officeDocument/2006/relationships" id="2147483672" r:id="R18b015becbc5455b"/>
+    <p:sldLayoutId xmlns:r="http://schemas.openxmlformats.org/officeDocument/2006/relationships" id="2147483673" r:id="R6df6f6894757494e"/>
+    <p:sldLayoutId xmlns:r="http://schemas.openxmlformats.org/officeDocument/2006/relationships" id="2147483674" r:id="Rc671669bc8e542d2"/>
+    <p:sldLayoutId xmlns:r="http://schemas.openxmlformats.org/officeDocument/2006/relationships" id="2147483675" r:id="R3b413aec10fa40ea"/>
+    <p:sldLayoutId xmlns:r="http://schemas.openxmlformats.org/officeDocument/2006/relationships" id="2147483676" r:id="R65f0ca55e0ae4ea4"/>
+    <p:sldLayoutId xmlns:r="http://schemas.openxmlformats.org/officeDocument/2006/relationships" id="2147483677" r:id="R9cc5e05c627d460a"/>
+    <p:sldLayoutId xmlns:r="http://schemas.openxmlformats.org/officeDocument/2006/relationships" id="2147483678" r:id="Rcde2a3657ab44fe1"/>
   </p:sldLayoutIdLst>
   <p:hf hdr="0" ftr="0" dt="0"/>
   <p:txStyles>
@@ -29333,7 +29232,7 @@
           <a:lstStyle xmlns:a="http://schemas.openxmlformats.org/drawingml/2006/main"/>
           <a:p xmlns:a="http://schemas.openxmlformats.org/drawingml/2006/main">
             <a:r>
-              <a:t>Why this is useful to oneMath at first glance</a:t>
+              <a:t>What the skill tells an agent today</a:t>
             </a:r>
           </a:p>
         </p:txBody>
@@ -29383,7 +29282,7 @@
                   <a:srgbClr val="000000"/>
                 </a:solidFill>
               </a:rPr>
-              <a:t> Stop naming confusion</a:t>
+              <a:t> Classify the domain</a:t>
             </a:r>
             <a:r>
               <a:rPr sz="1913">
@@ -29391,7 +29290,7 @@
                   <a:srgbClr val="000000"/>
                 </a:solidFill>
               </a:rPr>
-              <a:t> — The skill distinguishes open-source oneMath from Intel oneMKL and asks agents to name the actual backend.</a:t>
+              <a:t> — BLAS, LAPACK, RNG, DFT, or sparse BLAS before choosing an API path.</a:t>
             </a:r>
           </a:p>
           <a:p xmlns:a="http://schemas.openxmlformats.org/drawingml/2006/main">
@@ -29412,7 +29311,7 @@
                   <a:srgbClr val="000000"/>
                 </a:solidFill>
               </a:rPr>
-              <a:t> Choose the right dispatch path</a:t>
+              <a:t> Select a usage model</a:t>
             </a:r>
             <a:r>
               <a:rPr sz="1913">
@@ -29420,7 +29319,7 @@
                   <a:srgbClr val="000000"/>
                 </a:solidFill>
               </a:rPr>
-              <a:t> — Runtime dispatch, compile-time selectors, and RNG device API have different build and dependency contracts.</a:t>
+              <a:t> — Runtime dispatch for one link/load path; compile-time dispatch for explicit/static backend control; device API for supported in-kernel RNG.</a:t>
             </a:r>
           </a:p>
           <a:p xmlns:a="http://schemas.openxmlformats.org/drawingml/2006/main">
@@ -29441,7 +29340,7 @@
                   <a:srgbClr val="000000"/>
                 </a:solidFill>
               </a:rPr>
-              <a:t> Make queue ownership explicit</a:t>
+              <a:t> Write the math contract</a:t>
             </a:r>
             <a:r>
               <a:rPr sz="1913">
@@ -29449,7 +29348,7 @@
                   <a:srgbClr val="000000"/>
                 </a:solidFill>
               </a:rPr>
-              <a:t> — Agents preserve caller-owned execution and event dependencies instead of creating hidden queues.</a:t>
+              <a:t> — Precision, layout, dimensions, leading dimensions, batch strides, and event dependencies.</a:t>
             </a:r>
           </a:p>
           <a:p xmlns:a="http://schemas.openxmlformats.org/drawingml/2006/main">
@@ -29470,7 +29369,7 @@
                   <a:srgbClr val="000000"/>
                 </a:solidFill>
               </a:rPr>
-              <a:t> Prevent compatibility folklore</a:t>
+              <a:t> Diagnose build and runtime separately</a:t>
             </a:r>
             <a:r>
               <a:rPr sz="1913">
@@ -29478,7 +29377,36 @@
                   <a:srgbClr val="000000"/>
                 </a:solidFill>
               </a:rPr>
-              <a:t> — Backend/domain/OS/hardware claims require current support-matrix verification.</a:t>
+              <a:t> — Compiler, wrapper libraries, package discovery, runtime loader paths, and device visibility.</a:t>
+            </a:r>
+          </a:p>
+          <a:p xmlns:a="http://schemas.openxmlformats.org/drawingml/2006/main">
+            <a:pPr marL="30" indent="-18">
+              <a:spcAft>
+                <a:spcPts val="10"/>
+              </a:spcAft>
+              <a:buChar char="•"/>
+              <a:defRPr sz="1913">
+                <a:solidFill>
+                  <a:srgbClr val="000000"/>
+                </a:solidFill>
+              </a:defRPr>
+            </a:pPr>
+            <a:r>
+              <a:rPr sz="1913" b="1">
+                <a:solidFill>
+                  <a:srgbClr val="000000"/>
+                </a:solidFill>
+              </a:rPr>
+              <a:t> Test small known answers first</a:t>
+            </a:r>
+            <a:r>
+              <a:rPr sz="1913">
+                <a:solidFill>
+                  <a:srgbClr val="000000"/>
+                </a:solidFill>
+              </a:rPr>
+              <a:t> — Then measure representative sizes with dispatch and transfer scope stated.</a:t>
             </a:r>
           </a:p>
         </p:txBody>
@@ -29570,7 +29498,7 @@
           <a:lstStyle xmlns:a="http://schemas.openxmlformats.org/drawingml/2006/main"/>
           <a:p xmlns:a="http://schemas.openxmlformats.org/drawingml/2006/main">
             <a:r>
-              <a:t>What the skill tells an agent today</a:t>
+              <a:t>Evaluation inventory: 3 implemented, 3 targeted gaps</a:t>
             </a:r>
           </a:p>
         </p:txBody>
@@ -29620,7 +29548,7 @@
                   <a:srgbClr val="000000"/>
                 </a:solidFill>
               </a:rPr>
-              <a:t> Classify the domain</a:t>
+              <a:t> Implemented</a:t>
             </a:r>
             <a:r>
               <a:rPr sz="1913">
@@ -29628,7 +29556,7 @@
                   <a:srgbClr val="000000"/>
                 </a:solidFill>
               </a:rPr>
-              <a:t> — BLAS, LAPACK, RNG, DFT, or sparse BLAS before choosing an API path.</a:t>
+              <a:t> — Missing runtime backend library; packed-band storage fixtures; deprecated header include.</a:t>
             </a:r>
           </a:p>
           <a:p xmlns:a="http://schemas.openxmlformats.org/drawingml/2006/main">
@@ -29649,7 +29577,7 @@
                   <a:srgbClr val="000000"/>
                 </a:solidFill>
               </a:rPr>
-              <a:t> Select a usage model</a:t>
+              <a:t> Incident evidence</a:t>
             </a:r>
             <a:r>
               <a:rPr sz="1913">
@@ -29657,7 +29585,7 @@
                   <a:srgbClr val="000000"/>
                 </a:solidFill>
               </a:rPr>
-              <a:t> — Runtime dispatch for one link/load path; compile-time dispatch for explicit/static backend control; device API for supported in-kernel RNG.</a:t>
+              <a:t> — Two implemented tasks are grounded in upstream maintainer incidents.</a:t>
             </a:r>
           </a:p>
           <a:p xmlns:a="http://schemas.openxmlformats.org/drawingml/2006/main">
@@ -29678,7 +29606,7 @@
                   <a:srgbClr val="000000"/>
                 </a:solidFill>
               </a:rPr>
-              <a:t> Write the math contract</a:t>
+              <a:t> Planned device work</a:t>
             </a:r>
             <a:r>
               <a:rPr sz="1913">
@@ -29686,7 +29614,7 @@
                   <a:srgbClr val="000000"/>
                 </a:solidFill>
               </a:rPr>
-              <a:t> — Precision, layout, dimensions, leading dimensions, batch strides, and event dependencies.</a:t>
+              <a:t> — RNG device event chain and third-party backend wrapper on a declared target.</a:t>
             </a:r>
           </a:p>
           <a:p xmlns:a="http://schemas.openxmlformats.org/drawingml/2006/main">
@@ -29707,7 +29635,7 @@
                   <a:srgbClr val="000000"/>
                 </a:solidFill>
               </a:rPr>
-              <a:t> Diagnose build and runtime separately</a:t>
+              <a:t> Planned toolchain work</a:t>
             </a:r>
             <a:r>
               <a:rPr sz="1913">
@@ -29715,7 +29643,7 @@
                   <a:srgbClr val="000000"/>
                 </a:solidFill>
               </a:rPr>
-              <a:t> — Compiler, wrapper libraries, package discovery, runtime loader paths, and device visibility.</a:t>
+              <a:t> — Dispatch-overhead benchmark with a pinned hosted toolchain.</a:t>
             </a:r>
           </a:p>
           <a:p xmlns:a="http://schemas.openxmlformats.org/drawingml/2006/main">
@@ -29736,7 +29664,7 @@
                   <a:srgbClr val="000000"/>
                 </a:solidFill>
               </a:rPr>
-              <a:t> Test small known answers first</a:t>
+              <a:t> What this proves</a:t>
             </a:r>
             <a:r>
               <a:rPr sz="1913">
@@ -29744,7 +29672,7 @@
                   <a:srgbClr val="000000"/>
                 </a:solidFill>
               </a:rPr>
-              <a:t> — Then measure representative sizes with dispatch and transfer scope stated.</a:t>
+              <a:t> — Current tasks cover integration and API-contract reasoning, not the full backend matrix.</a:t>
             </a:r>
           </a:p>
         </p:txBody>
@@ -29836,7 +29764,7 @@
           <a:lstStyle xmlns:a="http://schemas.openxmlformats.org/drawingml/2006/main"/>
           <a:p xmlns:a="http://schemas.openxmlformats.org/drawingml/2006/main">
             <a:r>
-              <a:t>Evaluation inventory: 3 implemented, 3 targeted gaps</a:t>
+              <a:t>How we chose the content</a:t>
             </a:r>
           </a:p>
         </p:txBody>
@@ -29886,7 +29814,7 @@
                   <a:srgbClr val="000000"/>
                 </a:solidFill>
               </a:rPr>
-              <a:t> Implemented</a:t>
+              <a:t> Official project material</a:t>
             </a:r>
             <a:r>
               <a:rPr sz="1913">
@@ -29894,7 +29822,7 @@
                   <a:srgbClr val="000000"/>
                 </a:solidFill>
               </a:rPr>
-              <a:t> — Missing runtime backend library; packed-band storage fixtures; deprecated header include.</a:t>
+              <a:t> — Usage-model docs, build/link instructions, backend integration guidance, examples, releases, and support matrices.</a:t>
             </a:r>
           </a:p>
           <a:p xmlns:a="http://schemas.openxmlformats.org/drawingml/2006/main">
@@ -29915,7 +29843,7 @@
                   <a:srgbClr val="000000"/>
                 </a:solidFill>
               </a:rPr>
-              <a:t> Incident evidence</a:t>
+              <a:t> Common boundary failures</a:t>
             </a:r>
             <a:r>
               <a:rPr sz="1913">
@@ -29923,7 +29851,7 @@
                   <a:srgbClr val="000000"/>
                 </a:solidFill>
               </a:rPr>
-              <a:t> — Two implemented tasks are grounded in upstream maintainer incidents.</a:t>
+              <a:t> — Wrong dispatch assumption, missing runtime libraries, storage layout mistakes, include/package drift.</a:t>
             </a:r>
           </a:p>
           <a:p xmlns:a="http://schemas.openxmlformats.org/drawingml/2006/main">
@@ -29944,7 +29872,7 @@
                   <a:srgbClr val="000000"/>
                 </a:solidFill>
               </a:rPr>
-              <a:t> Planned device work</a:t>
+              <a:t> Portable wording</a:t>
             </a:r>
             <a:r>
               <a:rPr sz="1913">
@@ -29952,7 +29880,7 @@
                   <a:srgbClr val="000000"/>
                 </a:solidFill>
               </a:rPr>
-              <a:t> — RNG device event chain and third-party backend wrapper on a declared target.</a:t>
+              <a:t> — The skill names multiple backend families while requiring verification for the exact domain and version.</a:t>
             </a:r>
           </a:p>
           <a:p xmlns:a="http://schemas.openxmlformats.org/drawingml/2006/main">
@@ -29973,7 +29901,7 @@
                   <a:srgbClr val="000000"/>
                 </a:solidFill>
               </a:rPr>
-              <a:t> Planned toolchain work</a:t>
+              <a:t> Visible gaps</a:t>
             </a:r>
             <a:r>
               <a:rPr sz="1913">
@@ -29981,36 +29909,7 @@
                   <a:srgbClr val="000000"/>
                 </a:solidFill>
               </a:rPr>
-              <a:t> — Dispatch-overhead benchmark with a pinned hosted toolchain.</a:t>
-            </a:r>
-          </a:p>
-          <a:p xmlns:a="http://schemas.openxmlformats.org/drawingml/2006/main">
-            <a:pPr marL="30" indent="-18">
-              <a:spcAft>
-                <a:spcPts val="10"/>
-              </a:spcAft>
-              <a:buChar char="•"/>
-              <a:defRPr sz="1913">
-                <a:solidFill>
-                  <a:srgbClr val="000000"/>
-                </a:solidFill>
-              </a:defRPr>
-            </a:pPr>
-            <a:r>
-              <a:rPr sz="1913" b="1">
-                <a:solidFill>
-                  <a:srgbClr val="000000"/>
-                </a:solidFill>
-              </a:rPr>
-              <a:t> What this proves</a:t>
-            </a:r>
-            <a:r>
-              <a:rPr sz="1913">
-                <a:solidFill>
-                  <a:srgbClr val="000000"/>
-                </a:solidFill>
-              </a:rPr>
-              <a:t> — Current tasks cover integration and API-contract reasoning, not the full backend matrix.</a:t>
+              <a:t> — Device events, third-party wrappers, and dispatch measurement stay planned until their environments are credible.</a:t>
             </a:r>
           </a:p>
         </p:txBody>
@@ -30102,7 +30001,7 @@
           <a:lstStyle xmlns:a="http://schemas.openxmlformats.org/drawingml/2006/main"/>
           <a:p xmlns:a="http://schemas.openxmlformats.org/drawingml/2006/main">
             <a:r>
-              <a:t>How we chose the content</a:t>
+              <a:t>What project ownership would look like</a:t>
             </a:r>
           </a:p>
         </p:txBody>
@@ -30152,7 +30051,7 @@
                   <a:srgbClr val="000000"/>
                 </a:solidFill>
               </a:rPr>
-              <a:t> Official project material</a:t>
+              <a:t> Review the decision tree</a:t>
             </a:r>
             <a:r>
               <a:rPr sz="1913">
@@ -30160,7 +30059,7 @@
                   <a:srgbClr val="000000"/>
                 </a:solidFill>
               </a:rPr>
-              <a:t> — Usage-model docs, build/link instructions, backend integration guidance, examples, releases, and support matrices.</a:t>
+              <a:t> — Domain, host/device API, runtime versus compile-time dispatch, compiler, and backend.</a:t>
             </a:r>
           </a:p>
           <a:p xmlns:a="http://schemas.openxmlformats.org/drawingml/2006/main">
@@ -30181,7 +30080,7 @@
                   <a:srgbClr val="000000"/>
                 </a:solidFill>
               </a:rPr>
-              <a:t> Common boundary failures</a:t>
+              <a:t> Curate current sources</a:t>
             </a:r>
             <a:r>
               <a:rPr sz="1913">
@@ -30189,7 +30088,7 @@
                   <a:srgbClr val="000000"/>
                 </a:solidFill>
               </a:rPr>
-              <a:t> — Wrong dispatch assumption, missing runtime libraries, storage layout mistakes, include/package drift.</a:t>
+              <a:t> — Keep support-matrix and release-specific claims fresh; delete stale compatibility advice.</a:t>
             </a:r>
           </a:p>
           <a:p xmlns:a="http://schemas.openxmlformats.org/drawingml/2006/main">
@@ -30210,7 +30109,7 @@
                   <a:srgbClr val="000000"/>
                 </a:solidFill>
               </a:rPr>
-              <a:t> Portable wording</a:t>
+              <a:t> Shape the evaluation backlog</a:t>
             </a:r>
             <a:r>
               <a:rPr sz="1913">
@@ -30218,7 +30117,7 @@
                   <a:srgbClr val="000000"/>
                 </a:solidFill>
               </a:rPr>
-              <a:t> — The skill names multiple backend families while requiring verification for the exact domain and version.</a:t>
+              <a:t> — Replace constructed tasks with authentic integration failures when possible.</a:t>
             </a:r>
           </a:p>
           <a:p xmlns:a="http://schemas.openxmlformats.org/drawingml/2006/main">
@@ -30239,7 +30138,7 @@
                   <a:srgbClr val="000000"/>
                 </a:solidFill>
               </a:rPr>
-              <a:t> Visible gaps</a:t>
+              <a:t> UXL keeps the machinery</a:t>
             </a:r>
             <a:r>
               <a:rPr sz="1913">
@@ -30247,7 +30146,7 @@
                   <a:srgbClr val="000000"/>
                 </a:solidFill>
               </a:rPr>
-              <a:t> — Device events, third-party wrappers, and dispatch measurement stay planned until their environments are credible.</a:t>
+              <a:t> — Common validators, Harbor, dashboards, hosted toolchains, and runner contracts remain shared.</a:t>
             </a:r>
           </a:p>
         </p:txBody>
@@ -30339,243 +30238,6 @@
           <a:lstStyle xmlns:a="http://schemas.openxmlformats.org/drawingml/2006/main"/>
           <a:p xmlns:a="http://schemas.openxmlformats.org/drawingml/2006/main">
             <a:r>
-              <a:t>What project ownership would look like</a:t>
-            </a:r>
-          </a:p>
-        </p:txBody>
-      </p:sp>
-      <p:sp>
-        <p:nvSpPr>
-          <p:cNvPr id="3" name="Content Placeholder 2">
-            <a:extLst xmlns:a="http://schemas.openxmlformats.org/drawingml/2006/main">
-              <a:ext uri="{FF2B5EF4-FFF2-40B4-BE49-F238E27FC236}">
-                <a16:creationId xmlns:a16="http://schemas.microsoft.com/office/drawing/2014/main" id="{ECF5C9F1-2691-0BC9-F1E1-01CECB857FE3}"/>
-              </a:ext>
-            </a:extLst>
-          </p:cNvPr>
-          <p:cNvSpPr>
-            <a:spLocks xmlns:a="http://schemas.openxmlformats.org/drawingml/2006/main" noGrp="1"/>
-          </p:cNvSpPr>
-          <p:nvPr>
-            <p:ph type="body" idx="1"/>
-          </p:nvPr>
-        </p:nvSpPr>
-        <p:spPr>
-          <a:xfrm xmlns:a="http://schemas.openxmlformats.org/drawingml/2006/main">
-            <a:off x="838200" y="1825625"/>
-            <a:ext cx="10515600" cy="4351200"/>
-          </a:xfrm>
-        </p:spPr>
-        <p:txBody>
-          <a:bodyPr xmlns:a="http://schemas.openxmlformats.org/drawingml/2006/main" wrap="square" anchor="t">
-            <a:normAutofit fontScale="100000"/>
-          </a:bodyPr>
-          <a:lstStyle xmlns:a="http://schemas.openxmlformats.org/drawingml/2006/main"/>
-          <a:p xmlns:a="http://schemas.openxmlformats.org/drawingml/2006/main">
-            <a:pPr marL="30" indent="-18">
-              <a:spcAft>
-                <a:spcPts val="10"/>
-              </a:spcAft>
-              <a:buChar char="•"/>
-              <a:defRPr sz="1913">
-                <a:solidFill>
-                  <a:srgbClr val="000000"/>
-                </a:solidFill>
-              </a:defRPr>
-            </a:pPr>
-            <a:r>
-              <a:rPr sz="1913" b="1">
-                <a:solidFill>
-                  <a:srgbClr val="000000"/>
-                </a:solidFill>
-              </a:rPr>
-              <a:t> Review the decision tree</a:t>
-            </a:r>
-            <a:r>
-              <a:rPr sz="1913">
-                <a:solidFill>
-                  <a:srgbClr val="000000"/>
-                </a:solidFill>
-              </a:rPr>
-              <a:t> — Domain, host/device API, runtime versus compile-time dispatch, compiler, and backend.</a:t>
-            </a:r>
-          </a:p>
-          <a:p xmlns:a="http://schemas.openxmlformats.org/drawingml/2006/main">
-            <a:pPr marL="30" indent="-18">
-              <a:spcAft>
-                <a:spcPts val="10"/>
-              </a:spcAft>
-              <a:buChar char="•"/>
-              <a:defRPr sz="1913">
-                <a:solidFill>
-                  <a:srgbClr val="000000"/>
-                </a:solidFill>
-              </a:defRPr>
-            </a:pPr>
-            <a:r>
-              <a:rPr sz="1913" b="1">
-                <a:solidFill>
-                  <a:srgbClr val="000000"/>
-                </a:solidFill>
-              </a:rPr>
-              <a:t> Curate current sources</a:t>
-            </a:r>
-            <a:r>
-              <a:rPr sz="1913">
-                <a:solidFill>
-                  <a:srgbClr val="000000"/>
-                </a:solidFill>
-              </a:rPr>
-              <a:t> — Keep support-matrix and release-specific claims fresh; delete stale compatibility advice.</a:t>
-            </a:r>
-          </a:p>
-          <a:p xmlns:a="http://schemas.openxmlformats.org/drawingml/2006/main">
-            <a:pPr marL="30" indent="-18">
-              <a:spcAft>
-                <a:spcPts val="10"/>
-              </a:spcAft>
-              <a:buChar char="•"/>
-              <a:defRPr sz="1913">
-                <a:solidFill>
-                  <a:srgbClr val="000000"/>
-                </a:solidFill>
-              </a:defRPr>
-            </a:pPr>
-            <a:r>
-              <a:rPr sz="1913" b="1">
-                <a:solidFill>
-                  <a:srgbClr val="000000"/>
-                </a:solidFill>
-              </a:rPr>
-              <a:t> Shape the evaluation backlog</a:t>
-            </a:r>
-            <a:r>
-              <a:rPr sz="1913">
-                <a:solidFill>
-                  <a:srgbClr val="000000"/>
-                </a:solidFill>
-              </a:rPr>
-              <a:t> — Replace constructed tasks with authentic integration failures when possible.</a:t>
-            </a:r>
-          </a:p>
-          <a:p xmlns:a="http://schemas.openxmlformats.org/drawingml/2006/main">
-            <a:pPr marL="30" indent="-18">
-              <a:spcAft>
-                <a:spcPts val="10"/>
-              </a:spcAft>
-              <a:buChar char="•"/>
-              <a:defRPr sz="1913">
-                <a:solidFill>
-                  <a:srgbClr val="000000"/>
-                </a:solidFill>
-              </a:defRPr>
-            </a:pPr>
-            <a:r>
-              <a:rPr sz="1913" b="1">
-                <a:solidFill>
-                  <a:srgbClr val="000000"/>
-                </a:solidFill>
-              </a:rPr>
-              <a:t> UXL keeps the machinery</a:t>
-            </a:r>
-            <a:r>
-              <a:rPr sz="1913">
-                <a:solidFill>
-                  <a:srgbClr val="000000"/>
-                </a:solidFill>
-              </a:rPr>
-              <a:t> — Common validators, Harbor, dashboards, hosted toolchains, and runner contracts remain shared.</a:t>
-            </a:r>
-          </a:p>
-        </p:txBody>
-      </p:sp>
-      <p:sp>
-        <p:nvSpPr>
-          <p:cNvPr id="7" name="TextBox 6">
-            <a:extLst xmlns:a="http://schemas.openxmlformats.org/drawingml/2006/main">
-              <a:ext uri="{FF2B5EF4-FFF2-40B4-BE49-F238E27FC236}">
-                <a16:creationId xmlns:a16="http://schemas.microsoft.com/office/drawing/2014/main" id="{E2E6F043-0F84-54F7-A567-6E5851801779}"/>
-              </a:ext>
-            </a:extLst>
-          </p:cNvPr>
-          <p:cNvSpPr>
-            <a:spLocks xmlns:a="http://schemas.openxmlformats.org/drawingml/2006/main" noGrp="1"/>
-          </p:cNvSpPr>
-          <p:nvPr/>
-        </p:nvSpPr>
-        <p:spPr>
-          <a:xfrm xmlns:a="http://schemas.openxmlformats.org/drawingml/2006/main">
-            <a:off x="696174" y="6338986"/>
-            <a:ext cx="284052" cy="307777"/>
-          </a:xfrm>
-          <a:prstGeom xmlns:a="http://schemas.openxmlformats.org/drawingml/2006/main" prst="rect">
-            <a:avLst/>
-          </a:prstGeom>
-          <a:noFill xmlns:a="http://schemas.openxmlformats.org/drawingml/2006/main"/>
-        </p:spPr>
-        <p:txBody>
-          <a:bodyPr xmlns:a="http://schemas.openxmlformats.org/drawingml/2006/main" wrap="none">
-            <a:spAutoFit/>
-          </a:bodyPr>
-          <a:lstStyle xmlns:a="http://schemas.openxmlformats.org/drawingml/2006/main"/>
-          <a:p xmlns:a="http://schemas.openxmlformats.org/drawingml/2006/main">
-            <a:r>
-              <a:t>6</a:t>
-            </a:r>
-          </a:p>
-        </p:txBody>
-      </p:sp>
-    </p:spTree>
-    <p:extLst>
-      <p:ext uri="{BB962C8B-B14F-4D97-AF65-F5344CB8AC3E}">
-        <p14:creationId xmlns:p14="http://schemas.microsoft.com/office/powerpoint/2010/main" val="1742728663"/>
-      </p:ext>
-    </p:extLst>
-  </p:cSld>
-</p:sld>
-</file>
-
-<file path=ppt/slides/slide7.xml><?xml version="1.0" encoding="utf-8"?>
-<p:sld xmlns:p="http://schemas.openxmlformats.org/presentationml/2006/main">
-  <p:cSld>
-    <p:spTree>
-      <p:nvGrpSpPr>
-        <p:cNvPr id="1" name=""/>
-        <p:cNvGrpSpPr/>
-        <p:nvPr/>
-      </p:nvGrpSpPr>
-      <p:grpSpPr>
-        <a:xfrm xmlns:a="http://schemas.openxmlformats.org/drawingml/2006/main"/>
-      </p:grpSpPr>
-      <p:sp>
-        <p:nvSpPr>
-          <p:cNvPr id="2" name="Title 1">
-            <a:extLst xmlns:a="http://schemas.openxmlformats.org/drawingml/2006/main">
-              <a:ext uri="{FF2B5EF4-FFF2-40B4-BE49-F238E27FC236}">
-                <a16:creationId xmlns:a16="http://schemas.microsoft.com/office/drawing/2014/main" id="{F64C2A24-546D-C55C-2C52-97A4957F67E0}"/>
-              </a:ext>
-            </a:extLst>
-          </p:cNvPr>
-          <p:cNvSpPr>
-            <a:spLocks xmlns:a="http://schemas.openxmlformats.org/drawingml/2006/main" noGrp="1"/>
-          </p:cNvSpPr>
-          <p:nvPr>
-            <p:ph type="title" idx="0"/>
-          </p:nvPr>
-        </p:nvSpPr>
-        <p:spPr>
-          <a:xfrm xmlns:a="http://schemas.openxmlformats.org/drawingml/2006/main">
-            <a:off x="838200" y="365125"/>
-            <a:ext cx="10515600" cy="1325700"/>
-          </a:xfrm>
-        </p:spPr>
-        <p:txBody>
-          <a:bodyPr xmlns:a="http://schemas.openxmlformats.org/drawingml/2006/main">
-            <a:normAutofit fontScale="100000"/>
-          </a:bodyPr>
-          <a:lstStyle xmlns:a="http://schemas.openxmlformats.org/drawingml/2006/main"/>
-          <a:p xmlns:a="http://schemas.openxmlformats.org/drawingml/2006/main">
-            <a:r>
               <a:t>A focused 30-minute maintainer review</a:t>
             </a:r>
           </a:p>
@@ -30786,7 +30448,7 @@
           <a:lstStyle xmlns:a="http://schemas.openxmlformats.org/drawingml/2006/main"/>
           <a:p xmlns:a="http://schemas.openxmlformats.org/drawingml/2006/main">
             <a:r>
-              <a:t>7</a:t>
+              <a:t>6</a:t>
             </a:r>
           </a:p>
         </p:txBody>

--- a/evaluation/dashboard/public/decks/uxl-onemath-maintainer-briefing.pptx
+++ b/evaluation/dashboard/public/decks/uxl-onemath-maintainer-briefing.pptx
@@ -2,19 +2,19 @@
 <file path=ppt/presentation.xml><?xml version="1.0" encoding="utf-8"?>
 <p:presentation xmlns:p="http://schemas.openxmlformats.org/presentationml/2006/main">
   <p:sldMasterIdLst>
-    <p:sldMasterId xmlns:r="http://schemas.openxmlformats.org/officeDocument/2006/relationships" id="2147483648" r:id="Rcc1eb1a49c4a4afc"/>
-    <p:sldMasterId xmlns:r="http://schemas.openxmlformats.org/officeDocument/2006/relationships" id="2147483665" r:id="R5cef3a8a603a46f5"/>
+    <p:sldMasterId xmlns:r="http://schemas.openxmlformats.org/officeDocument/2006/relationships" id="2147483648" r:id="R20a350488f444eee"/>
+    <p:sldMasterId xmlns:r="http://schemas.openxmlformats.org/officeDocument/2006/relationships" id="2147483665" r:id="R777e01d1adc349cb"/>
   </p:sldMasterIdLst>
   <p:notesMasterIdLst>
-    <p:notesMasterId xmlns:r="http://schemas.openxmlformats.org/officeDocument/2006/relationships" r:id="R8c167993cca44b9d"/>
+    <p:notesMasterId xmlns:r="http://schemas.openxmlformats.org/officeDocument/2006/relationships" r:id="Rddf7f1b29ba24bc1"/>
   </p:notesMasterIdLst>
   <p:sldIdLst>
-    <p:sldId xmlns:r="http://schemas.openxmlformats.org/officeDocument/2006/relationships" id="256" r:id="R0ef20cf0f7c640d7"/>
-    <p:sldId xmlns:r="http://schemas.openxmlformats.org/officeDocument/2006/relationships" id="257" r:id="R171f2aec1ee4488b"/>
-    <p:sldId xmlns:r="http://schemas.openxmlformats.org/officeDocument/2006/relationships" id="258" r:id="R6d93f807465f4283"/>
-    <p:sldId xmlns:r="http://schemas.openxmlformats.org/officeDocument/2006/relationships" id="259" r:id="Rda90a5160bb94c7e"/>
-    <p:sldId xmlns:r="http://schemas.openxmlformats.org/officeDocument/2006/relationships" id="260" r:id="R17d501ec78104af4"/>
-    <p:sldId xmlns:r="http://schemas.openxmlformats.org/officeDocument/2006/relationships" id="261" r:id="R4abd3f420951406c"/>
+    <p:sldId xmlns:r="http://schemas.openxmlformats.org/officeDocument/2006/relationships" id="256" r:id="R0672e03cb7214c5b"/>
+    <p:sldId xmlns:r="http://schemas.openxmlformats.org/officeDocument/2006/relationships" id="257" r:id="R2438e2d1e01c48de"/>
+    <p:sldId xmlns:r="http://schemas.openxmlformats.org/officeDocument/2006/relationships" id="258" r:id="R11d0162f073b4977"/>
+    <p:sldId xmlns:r="http://schemas.openxmlformats.org/officeDocument/2006/relationships" id="259" r:id="R7e13234689c3491a"/>
+    <p:sldId xmlns:r="http://schemas.openxmlformats.org/officeDocument/2006/relationships" id="260" r:id="R1b73e023f617495e"/>
+    <p:sldId xmlns:r="http://schemas.openxmlformats.org/officeDocument/2006/relationships" id="261" r:id="Rd6af871276c74441"/>
   </p:sldIdLst>
   <p:sldSz cx="12192000" cy="6858000"/>
   <p:notesSz cx="6858000" cy="9144000"/>
@@ -493,7 +493,17 @@
           </a:p>
           <a:p xmlns:a="http://schemas.openxmlformats.org/drawingml/2006/main">
             <a:r>
+              <a:t>- https://github.com/uxlfoundation/skills/blob/main/docs/maintainer-review/uxl-onemath.md</a:t>
+            </a:r>
+          </a:p>
+          <a:p xmlns:a="http://schemas.openxmlformats.org/drawingml/2006/main">
+            <a:r>
               <a:t>- https://github.com/uxlfoundation/skills/blob/main/evaluation/harbor/suites.json</a:t>
+            </a:r>
+          </a:p>
+          <a:p xmlns:a="http://schemas.openxmlformats.org/drawingml/2006/main">
+            <a:r>
+              <a:t>- https://github.com/uxlfoundation/skills/blob/main/evaluation/harbor/EVALUATOR_POLICY.md</a:t>
             </a:r>
           </a:p>
           <a:p xmlns:a="http://schemas.openxmlformats.org/drawingml/2006/main">
@@ -508,7 +518,22 @@
           </a:p>
           <a:p xmlns:a="http://schemas.openxmlformats.org/drawingml/2006/main">
             <a:r>
-              <a:t>Speaker cue: oneMath skill: portability starts with the right usage model</a:t>
+              <a:t>Presenter guidance</a:t>
+            </a:r>
+          </a:p>
+          <a:p xmlns:a="http://schemas.openxmlformats.org/drawingml/2006/main">
+            <a:r>
+              <a:t>Purpose: Introduce the draft oneMath skill and its current evaluation coverage.</a:t>
+            </a:r>
+          </a:p>
+          <a:p xmlns:a="http://schemas.openxmlformats.org/drawingml/2006/main">
+            <a:r>
+              <a:t>Explain: The skill helps coding agents reason about domain and API choice, queue and dependency handling, backend dispatch, linking, storage, workspace, and reproducibility.</a:t>
+            </a:r>
+          </a:p>
+          <a:p xmlns:a="http://schemas.openxmlformats.org/drawingml/2006/main">
+            <a:r>
+              <a:t>Emphasize: This is a UXL-authored starting point awaiting project review, not approved maintainer guidance.</a:t>
             </a:r>
           </a:p>
         </p:txBody>
@@ -593,7 +618,17 @@
           </a:p>
           <a:p xmlns:a="http://schemas.openxmlformats.org/drawingml/2006/main">
             <a:r>
+              <a:t>- https://github.com/uxlfoundation/skills/blob/main/docs/maintainer-review/uxl-onemath.md</a:t>
+            </a:r>
+          </a:p>
+          <a:p xmlns:a="http://schemas.openxmlformats.org/drawingml/2006/main">
+            <a:r>
               <a:t>- https://github.com/uxlfoundation/skills/blob/main/evaluation/harbor/suites.json</a:t>
+            </a:r>
+          </a:p>
+          <a:p xmlns:a="http://schemas.openxmlformats.org/drawingml/2006/main">
+            <a:r>
+              <a:t>- https://github.com/uxlfoundation/skills/blob/main/evaluation/harbor/EVALUATOR_POLICY.md</a:t>
             </a:r>
           </a:p>
           <a:p xmlns:a="http://schemas.openxmlformats.org/drawingml/2006/main">
@@ -608,7 +643,22 @@
           </a:p>
           <a:p xmlns:a="http://schemas.openxmlformats.org/drawingml/2006/main">
             <a:r>
-              <a:t>Speaker cue: What the skill tells an agent today</a:t>
+              <a:t>Presenter guidance</a:t>
+            </a:r>
+          </a:p>
+          <a:p xmlns:a="http://schemas.openxmlformats.org/drawingml/2006/main">
+            <a:r>
+              <a:t>Purpose: Walk through the behavior the skill asks an agent to follow today.</a:t>
+            </a:r>
+          </a:p>
+          <a:p xmlns:a="http://schemas.openxmlformats.org/drawingml/2006/main">
+            <a:r>
+              <a:t>Explain: The intended sequence is to choose the computation model first, record backend and runtime details, respect storage and workspace contracts, and separate compile, link, runtime, and numeric failures.</a:t>
+            </a:r>
+          </a:p>
+          <a:p xmlns:a="http://schemas.openxmlformats.org/drawingml/2006/main">
+            <a:r>
+              <a:t>Emphasize: A useful answer ends with reproducible evidence and a clear failure classification, not a plausible-looking command alone.</a:t>
             </a:r>
           </a:p>
         </p:txBody>
@@ -693,7 +743,17 @@
           </a:p>
           <a:p xmlns:a="http://schemas.openxmlformats.org/drawingml/2006/main">
             <a:r>
+              <a:t>- https://github.com/uxlfoundation/skills/blob/main/docs/maintainer-review/uxl-onemath.md</a:t>
+            </a:r>
+          </a:p>
+          <a:p xmlns:a="http://schemas.openxmlformats.org/drawingml/2006/main">
+            <a:r>
               <a:t>- https://github.com/uxlfoundation/skills/blob/main/evaluation/harbor/suites.json</a:t>
+            </a:r>
+          </a:p>
+          <a:p xmlns:a="http://schemas.openxmlformats.org/drawingml/2006/main">
+            <a:r>
+              <a:t>- https://github.com/uxlfoundation/skills/blob/main/evaluation/harbor/EVALUATOR_POLICY.md</a:t>
             </a:r>
           </a:p>
           <a:p xmlns:a="http://schemas.openxmlformats.org/drawingml/2006/main">
@@ -708,7 +768,22 @@
           </a:p>
           <a:p xmlns:a="http://schemas.openxmlformats.org/drawingml/2006/main">
             <a:r>
-              <a:t>Speaker cue: Evaluation inventory: 3 implemented, 3 targeted gaps</a:t>
+              <a:t>Presenter guidance</a:t>
+            </a:r>
+          </a:p>
+          <a:p xmlns:a="http://schemas.openxmlformats.org/drawingml/2006/main">
+            <a:r>
+              <a:t>Purpose: Separate evaluation inventory from evidence that the skill improves outcomes.</a:t>
+            </a:r>
+          </a:p>
+          <a:p xmlns:a="http://schemas.openxmlformats.org/drawingml/2006/main">
+            <a:r>
+              <a:t>Explain: 3 of 6 evaluation tasks are implemented; three runnable scenarios establish smoke and evidence checks; RNG chaining, backend integration, and dispatch-overhead scenarios still need authentic project cases.</a:t>
+            </a:r>
+          </a:p>
+          <a:p xmlns:a="http://schemas.openxmlformats.org/drawingml/2006/main">
+            <a:r>
+              <a:t>Emphasize: Implemented means the task can run. It does not mean the task passes, discriminates between treatments, or supports a promotion claim.</a:t>
             </a:r>
           </a:p>
         </p:txBody>
@@ -793,7 +868,17 @@
           </a:p>
           <a:p xmlns:a="http://schemas.openxmlformats.org/drawingml/2006/main">
             <a:r>
+              <a:t>- https://github.com/uxlfoundation/skills/blob/main/docs/maintainer-review/uxl-onemath.md</a:t>
+            </a:r>
+          </a:p>
+          <a:p xmlns:a="http://schemas.openxmlformats.org/drawingml/2006/main">
+            <a:r>
               <a:t>- https://github.com/uxlfoundation/skills/blob/main/evaluation/harbor/suites.json</a:t>
+            </a:r>
+          </a:p>
+          <a:p xmlns:a="http://schemas.openxmlformats.org/drawingml/2006/main">
+            <a:r>
+              <a:t>- https://github.com/uxlfoundation/skills/blob/main/evaluation/harbor/EVALUATOR_POLICY.md</a:t>
             </a:r>
           </a:p>
           <a:p xmlns:a="http://schemas.openxmlformats.org/drawingml/2006/main">
@@ -808,7 +893,22 @@
           </a:p>
           <a:p xmlns:a="http://schemas.openxmlformats.org/drawingml/2006/main">
             <a:r>
-              <a:t>Speaker cue: How we chose the content</a:t>
+              <a:t>Presenter guidance</a:t>
+            </a:r>
+          </a:p>
+          <a:p xmlns:a="http://schemas.openxmlformats.org/drawingml/2006/main">
+            <a:r>
+              <a:t>Purpose: Show how the draft guidance and task set were selected.</a:t>
+            </a:r>
+          </a:p>
+          <a:p xmlns:a="http://schemas.openxmlformats.org/drawingml/2006/main">
+            <a:r>
+              <a:t>Explain: The starting material comes from official oneMath documentation, examples, tests, and maintainer evidence, with version-specific backend claims deferred to current upstream sources.</a:t>
+            </a:r>
+          </a:p>
+          <a:p xmlns:a="http://schemas.openxmlformats.org/drawingml/2006/main">
+            <a:r>
+              <a:t>Emphasize: Maintainers should correct, remove, or replace anything that does not reflect current project practice.</a:t>
             </a:r>
           </a:p>
         </p:txBody>
@@ -893,7 +993,17 @@
           </a:p>
           <a:p xmlns:a="http://schemas.openxmlformats.org/drawingml/2006/main">
             <a:r>
+              <a:t>- https://github.com/uxlfoundation/skills/blob/main/docs/maintainer-review/uxl-onemath.md</a:t>
+            </a:r>
+          </a:p>
+          <a:p xmlns:a="http://schemas.openxmlformats.org/drawingml/2006/main">
+            <a:r>
               <a:t>- https://github.com/uxlfoundation/skills/blob/main/evaluation/harbor/suites.json</a:t>
+            </a:r>
+          </a:p>
+          <a:p xmlns:a="http://schemas.openxmlformats.org/drawingml/2006/main">
+            <a:r>
+              <a:t>- https://github.com/uxlfoundation/skills/blob/main/evaluation/harbor/EVALUATOR_POLICY.md</a:t>
             </a:r>
           </a:p>
           <a:p xmlns:a="http://schemas.openxmlformats.org/drawingml/2006/main">
@@ -908,7 +1018,22 @@
           </a:p>
           <a:p xmlns:a="http://schemas.openxmlformats.org/drawingml/2006/main">
             <a:r>
-              <a:t>Speaker cue: What project ownership would look like</a:t>
+              <a:t>Presenter guidance</a:t>
+            </a:r>
+          </a:p>
+          <a:p xmlns:a="http://schemas.openxmlformats.org/drawingml/2006/main">
+            <a:r>
+              <a:t>Purpose: Clarify the proposed ownership boundary.</a:t>
+            </a:r>
+          </a:p>
+          <a:p xmlns:a="http://schemas.openxmlformats.org/drawingml/2006/main">
+            <a:r>
+              <a:t>Explain: oneMath maintainers own triggers, API truth, source freshness, limitations, and authentic cases; UXL maintains the catalog, Harbor integration, comparison design, and dashboard.</a:t>
+            </a:r>
+          </a:p>
+          <a:p xmlns:a="http://schemas.openxmlformats.org/drawingml/2006/main">
+            <a:r>
+              <a:t>Emphasize: The skill cannot move beyond its incubating state without named project review.</a:t>
             </a:r>
           </a:p>
         </p:txBody>
@@ -993,7 +1118,17 @@
           </a:p>
           <a:p xmlns:a="http://schemas.openxmlformats.org/drawingml/2006/main">
             <a:r>
+              <a:t>- https://github.com/uxlfoundation/skills/blob/main/docs/maintainer-review/uxl-onemath.md</a:t>
+            </a:r>
+          </a:p>
+          <a:p xmlns:a="http://schemas.openxmlformats.org/drawingml/2006/main">
+            <a:r>
               <a:t>- https://github.com/uxlfoundation/skills/blob/main/evaluation/harbor/suites.json</a:t>
+            </a:r>
+          </a:p>
+          <a:p xmlns:a="http://schemas.openxmlformats.org/drawingml/2006/main">
+            <a:r>
+              <a:t>- https://github.com/uxlfoundation/skills/blob/main/evaluation/harbor/EVALUATOR_POLICY.md</a:t>
             </a:r>
           </a:p>
           <a:p xmlns:a="http://schemas.openxmlformats.org/drawingml/2006/main">
@@ -1008,7 +1143,22 @@
           </a:p>
           <a:p xmlns:a="http://schemas.openxmlformats.org/drawingml/2006/main">
             <a:r>
-              <a:t>Speaker cue: A focused 30-minute maintainer review</a:t>
+              <a:t>Presenter guidance</a:t>
+            </a:r>
+          </a:p>
+          <a:p xmlns:a="http://schemas.openxmlformats.org/drawingml/2006/main">
+            <a:r>
+              <a:t>Purpose: End with a small, concrete review request.</a:t>
+            </a:r>
+          </a:p>
+          <a:p xmlns:a="http://schemas.openxmlformats.org/drawingml/2006/main">
+            <a:r>
+              <a:t>Explain: Ask maintainers to check the trigger and technical guidance, judge the task inventory, and name a reviewer or owner.</a:t>
+            </a:r>
+          </a:p>
+          <a:p xmlns:a="http://schemas.openxmlformats.org/drawingml/2006/main">
+            <a:r>
+              <a:t>Emphasize: The desired output is specific corrections and realistic cases, not blanket endorsement of the draft.</a:t>
             </a:r>
           </a:p>
         </p:txBody>
@@ -1044,7 +1194,7 @@
     <p:bg>
       <p:bgPr>
         <a:blipFill xmlns:a="http://schemas.openxmlformats.org/drawingml/2006/main">
-          <a:blip xmlns:r="http://schemas.openxmlformats.org/officeDocument/2006/relationships" r:embed="R184fe0e243664efa">
+          <a:blip xmlns:r="http://schemas.openxmlformats.org/officeDocument/2006/relationships" r:embed="R8a4f4417d58242fb">
             <a:alphaModFix/>
           </a:blip>
           <a:stretch>
@@ -1479,7 +1629,7 @@
           <p:nvPr/>
         </p:nvPicPr>
         <p:blipFill rotWithShape="1">
-          <a:blip xmlns:r="http://schemas.openxmlformats.org/officeDocument/2006/relationships" xmlns:a="http://schemas.openxmlformats.org/drawingml/2006/main" r:embed="R986810c48c14495a">
+          <a:blip xmlns:r="http://schemas.openxmlformats.org/officeDocument/2006/relationships" xmlns:a="http://schemas.openxmlformats.org/drawingml/2006/main" r:embed="Rf1e1e2334c684b0c">
             <a:alphaModFix/>
           </a:blip>
           <a:srcRect xmlns:a="http://schemas.openxmlformats.org/drawingml/2006/main" l="0" t="0" r="0" b="0"/>
@@ -1509,7 +1659,7 @@
     <p:bg>
       <p:bgPr>
         <a:blipFill xmlns:a="http://schemas.openxmlformats.org/drawingml/2006/main">
-          <a:blip xmlns:r="http://schemas.openxmlformats.org/officeDocument/2006/relationships" r:embed="R776fa131e6a44147">
+          <a:blip xmlns:r="http://schemas.openxmlformats.org/officeDocument/2006/relationships" r:embed="Rbb3d72bda3c54166">
             <a:alphaModFix/>
           </a:blip>
           <a:stretch>
@@ -2543,7 +2693,7 @@
           <p:nvPr/>
         </p:nvPicPr>
         <p:blipFill rotWithShape="1">
-          <a:blip xmlns:r="http://schemas.openxmlformats.org/officeDocument/2006/relationships" xmlns:a="http://schemas.openxmlformats.org/drawingml/2006/main" r:embed="Rbcc85aad1a6a457b">
+          <a:blip xmlns:r="http://schemas.openxmlformats.org/officeDocument/2006/relationships" xmlns:a="http://schemas.openxmlformats.org/drawingml/2006/main" r:embed="Ra5aeb6bea0514d83">
             <a:alphaModFix/>
           </a:blip>
           <a:srcRect xmlns:a="http://schemas.openxmlformats.org/drawingml/2006/main" l="0" t="0" r="0" b="0"/>
@@ -3567,7 +3717,7 @@
           <p:nvPr/>
         </p:nvPicPr>
         <p:blipFill rotWithShape="1">
-          <a:blip xmlns:r="http://schemas.openxmlformats.org/officeDocument/2006/relationships" xmlns:a="http://schemas.openxmlformats.org/drawingml/2006/main" r:embed="R93c191434ba44b93">
+          <a:blip xmlns:r="http://schemas.openxmlformats.org/officeDocument/2006/relationships" xmlns:a="http://schemas.openxmlformats.org/drawingml/2006/main" r:embed="Rea12261dc3ff4863">
             <a:alphaModFix/>
           </a:blip>
           <a:srcRect xmlns:a="http://schemas.openxmlformats.org/drawingml/2006/main" l="0" t="0" r="0" b="0"/>
@@ -3597,7 +3747,7 @@
     <p:bg>
       <p:bgPr>
         <a:blipFill xmlns:a="http://schemas.openxmlformats.org/drawingml/2006/main">
-          <a:blip xmlns:r="http://schemas.openxmlformats.org/officeDocument/2006/relationships" r:embed="R87e2f2d8a18149e1">
+          <a:blip xmlns:r="http://schemas.openxmlformats.org/officeDocument/2006/relationships" r:embed="R0f79eeea6372425f">
             <a:alphaModFix/>
           </a:blip>
           <a:stretch>
@@ -4871,7 +5021,7 @@
           <p:nvPr/>
         </p:nvPicPr>
         <p:blipFill rotWithShape="1">
-          <a:blip xmlns:r="http://schemas.openxmlformats.org/officeDocument/2006/relationships" xmlns:a="http://schemas.openxmlformats.org/drawingml/2006/main" r:embed="R08e6e017dfcd42a6">
+          <a:blip xmlns:r="http://schemas.openxmlformats.org/officeDocument/2006/relationships" xmlns:a="http://schemas.openxmlformats.org/drawingml/2006/main" r:embed="Rb201a92cb78a417d">
             <a:alphaModFix/>
           </a:blip>
           <a:srcRect xmlns:a="http://schemas.openxmlformats.org/drawingml/2006/main" l="0" t="0" r="0" b="0"/>
@@ -8115,7 +8265,7 @@
           <p:nvPr/>
         </p:nvPicPr>
         <p:blipFill rotWithShape="1">
-          <a:blip xmlns:r="http://schemas.openxmlformats.org/officeDocument/2006/relationships" xmlns:a="http://schemas.openxmlformats.org/drawingml/2006/main" r:embed="R144115705fd148c7">
+          <a:blip xmlns:r="http://schemas.openxmlformats.org/officeDocument/2006/relationships" xmlns:a="http://schemas.openxmlformats.org/drawingml/2006/main" r:embed="R6d42bf3799f8450e">
             <a:alphaModFix/>
           </a:blip>
           <a:srcRect xmlns:a="http://schemas.openxmlformats.org/drawingml/2006/main" l="0" t="0" r="0" b="0"/>
@@ -9853,7 +10003,7 @@
           <p:nvPr/>
         </p:nvPicPr>
         <p:blipFill rotWithShape="1">
-          <a:blip xmlns:r="http://schemas.openxmlformats.org/officeDocument/2006/relationships" xmlns:a="http://schemas.openxmlformats.org/drawingml/2006/main" r:embed="R1e995081f6f74cd0">
+          <a:blip xmlns:r="http://schemas.openxmlformats.org/officeDocument/2006/relationships" xmlns:a="http://schemas.openxmlformats.org/drawingml/2006/main" r:embed="R51135a11d2ef4cbb">
             <a:alphaModFix/>
           </a:blip>
           <a:srcRect xmlns:a="http://schemas.openxmlformats.org/drawingml/2006/main" l="0" t="0" r="0" b="0"/>
@@ -16682,7 +16832,7 @@
     <p:bg>
       <p:bgPr>
         <a:blipFill xmlns:a="http://schemas.openxmlformats.org/drawingml/2006/main">
-          <a:blip xmlns:r="http://schemas.openxmlformats.org/officeDocument/2006/relationships" r:embed="R073ebc3963e9444c">
+          <a:blip xmlns:r="http://schemas.openxmlformats.org/officeDocument/2006/relationships" r:embed="Rc51df93052e14e23">
             <a:alphaModFix/>
           </a:blip>
           <a:stretch>
@@ -17117,7 +17267,7 @@
           <p:nvPr/>
         </p:nvPicPr>
         <p:blipFill rotWithShape="1">
-          <a:blip xmlns:r="http://schemas.openxmlformats.org/officeDocument/2006/relationships" xmlns:a="http://schemas.openxmlformats.org/drawingml/2006/main" r:embed="Ra5004691d3494e60">
+          <a:blip xmlns:r="http://schemas.openxmlformats.org/officeDocument/2006/relationships" xmlns:a="http://schemas.openxmlformats.org/drawingml/2006/main" r:embed="R77f5f1bc54f5482a">
             <a:alphaModFix/>
           </a:blip>
           <a:srcRect xmlns:a="http://schemas.openxmlformats.org/drawingml/2006/main" l="0" t="0" r="0" b="0"/>
@@ -17147,7 +17297,7 @@
     <p:bg>
       <p:bgPr>
         <a:blipFill xmlns:a="http://schemas.openxmlformats.org/drawingml/2006/main">
-          <a:blip xmlns:r="http://schemas.openxmlformats.org/officeDocument/2006/relationships" r:embed="Rdaae93f5e9134aed">
+          <a:blip xmlns:r="http://schemas.openxmlformats.org/officeDocument/2006/relationships" r:embed="R3e31d50dd184407e">
             <a:alphaModFix/>
           </a:blip>
           <a:stretch>
@@ -17780,7 +17930,7 @@
           <p:nvPr/>
         </p:nvPicPr>
         <p:blipFill rotWithShape="1">
-          <a:blip xmlns:r="http://schemas.openxmlformats.org/officeDocument/2006/relationships" xmlns:a="http://schemas.openxmlformats.org/drawingml/2006/main" r:embed="Rd72ea5376fe14feb">
+          <a:blip xmlns:r="http://schemas.openxmlformats.org/officeDocument/2006/relationships" xmlns:a="http://schemas.openxmlformats.org/drawingml/2006/main" r:embed="Re79b072a02ab45c9">
             <a:alphaModFix/>
           </a:blip>
           <a:srcRect xmlns:a="http://schemas.openxmlformats.org/drawingml/2006/main" l="0" t="0" r="0" b="0"/>
@@ -18240,7 +18390,7 @@
     <p:bg>
       <p:bgPr>
         <a:blipFill xmlns:a="http://schemas.openxmlformats.org/drawingml/2006/main">
-          <a:blip xmlns:r="http://schemas.openxmlformats.org/officeDocument/2006/relationships" r:embed="Rff4746025dc0422a">
+          <a:blip xmlns:r="http://schemas.openxmlformats.org/officeDocument/2006/relationships" r:embed="Rf9b22957e6624537">
             <a:alphaModFix/>
           </a:blip>
           <a:stretch>
@@ -18873,7 +19023,7 @@
           <p:nvPr/>
         </p:nvPicPr>
         <p:blipFill rotWithShape="1">
-          <a:blip xmlns:r="http://schemas.openxmlformats.org/officeDocument/2006/relationships" xmlns:a="http://schemas.openxmlformats.org/drawingml/2006/main" r:embed="R316198f654994425">
+          <a:blip xmlns:r="http://schemas.openxmlformats.org/officeDocument/2006/relationships" xmlns:a="http://schemas.openxmlformats.org/drawingml/2006/main" r:embed="R0952c2de3cf64b1b">
             <a:alphaModFix/>
           </a:blip>
           <a:srcRect xmlns:a="http://schemas.openxmlformats.org/drawingml/2006/main" l="0" t="0" r="0" b="0"/>
@@ -21529,7 +21679,7 @@
           <p:nvPr/>
         </p:nvPicPr>
         <p:blipFill rotWithShape="1">
-          <a:blip xmlns:r="http://schemas.openxmlformats.org/officeDocument/2006/relationships" xmlns:a="http://schemas.openxmlformats.org/drawingml/2006/main" r:embed="R00b46485208e42fc">
+          <a:blip xmlns:r="http://schemas.openxmlformats.org/officeDocument/2006/relationships" xmlns:a="http://schemas.openxmlformats.org/drawingml/2006/main" r:embed="R2bb9f7cb15c847b1">
             <a:alphaModFix/>
           </a:blip>
           <a:srcRect xmlns:a="http://schemas.openxmlformats.org/drawingml/2006/main" l="0" t="0" r="0" b="0"/>
@@ -21559,7 +21709,7 @@
     <p:bg>
       <p:bgPr>
         <a:blipFill xmlns:a="http://schemas.openxmlformats.org/drawingml/2006/main">
-          <a:blip xmlns:r="http://schemas.openxmlformats.org/officeDocument/2006/relationships" r:embed="R564fd0f15e5c499d">
+          <a:blip xmlns:r="http://schemas.openxmlformats.org/officeDocument/2006/relationships" r:embed="R0b1aca29945f412b">
             <a:alphaModFix/>
           </a:blip>
           <a:stretch>
@@ -22403,7 +22553,7 @@
           <p:nvPr/>
         </p:nvPicPr>
         <p:blipFill rotWithShape="1">
-          <a:blip xmlns:r="http://schemas.openxmlformats.org/officeDocument/2006/relationships" xmlns:a="http://schemas.openxmlformats.org/drawingml/2006/main" r:embed="R196ea756aa334ce7">
+          <a:blip xmlns:r="http://schemas.openxmlformats.org/officeDocument/2006/relationships" xmlns:a="http://schemas.openxmlformats.org/drawingml/2006/main" r:embed="R2fb3e27f80654e02">
             <a:alphaModFix/>
           </a:blip>
           <a:srcRect xmlns:a="http://schemas.openxmlformats.org/drawingml/2006/main" l="0" t="0" r="0" b="0"/>
@@ -22433,7 +22583,7 @@
     <p:bg>
       <p:bgPr>
         <a:blipFill xmlns:a="http://schemas.openxmlformats.org/drawingml/2006/main">
-          <a:blip xmlns:r="http://schemas.openxmlformats.org/officeDocument/2006/relationships" r:embed="Racbaf91e8cde49d9">
+          <a:blip xmlns:r="http://schemas.openxmlformats.org/officeDocument/2006/relationships" r:embed="R52e49dbfadd44920">
             <a:alphaModFix/>
           </a:blip>
           <a:stretch>
@@ -23381,7 +23531,7 @@
           <p:nvPr/>
         </p:nvPicPr>
         <p:blipFill rotWithShape="1">
-          <a:blip xmlns:r="http://schemas.openxmlformats.org/officeDocument/2006/relationships" xmlns:a="http://schemas.openxmlformats.org/drawingml/2006/main" r:embed="Rd331f8ede9b24945">
+          <a:blip xmlns:r="http://schemas.openxmlformats.org/officeDocument/2006/relationships" xmlns:a="http://schemas.openxmlformats.org/drawingml/2006/main" r:embed="Rf5feaddd5cc7410f">
             <a:alphaModFix/>
           </a:blip>
           <a:srcRect xmlns:a="http://schemas.openxmlformats.org/drawingml/2006/main" l="0" t="0" r="0" b="0"/>
@@ -23411,7 +23561,7 @@
     <p:bg>
       <p:bgPr>
         <a:blipFill xmlns:a="http://schemas.openxmlformats.org/drawingml/2006/main">
-          <a:blip xmlns:r="http://schemas.openxmlformats.org/officeDocument/2006/relationships" r:embed="Rf53d4676005f49a5">
+          <a:blip xmlns:r="http://schemas.openxmlformats.org/officeDocument/2006/relationships" r:embed="R0f1419f62cc545c5">
             <a:alphaModFix/>
           </a:blip>
           <a:stretch>
@@ -23872,7 +24022,7 @@
           <p:nvPr/>
         </p:nvPicPr>
         <p:blipFill rotWithShape="1">
-          <a:blip xmlns:r="http://schemas.openxmlformats.org/officeDocument/2006/relationships" xmlns:a="http://schemas.openxmlformats.org/drawingml/2006/main" r:embed="Rb0739c16f94344fb">
+          <a:blip xmlns:r="http://schemas.openxmlformats.org/officeDocument/2006/relationships" xmlns:a="http://schemas.openxmlformats.org/drawingml/2006/main" r:embed="R1113cfec455d46a7">
             <a:alphaModFix/>
           </a:blip>
           <a:srcRect xmlns:a="http://schemas.openxmlformats.org/drawingml/2006/main" l="0" t="0" r="0" b="0"/>
@@ -25584,22 +25734,22 @@
   </p:cSld>
   <p:clrMap bg1="lt1" tx1="dk1" bg2="dk2" tx2="lt2" accent1="accent1" accent2="accent2" accent3="accent3" accent4="accent4" accent5="accent5" accent6="accent6" hlink="hlink" folHlink="folHlink"/>
   <p:sldLayoutIdLst>
-    <p:sldLayoutId xmlns:r="http://schemas.openxmlformats.org/officeDocument/2006/relationships" id="2147483649" r:id="Rb09275d15591411d"/>
-    <p:sldLayoutId xmlns:r="http://schemas.openxmlformats.org/officeDocument/2006/relationships" id="2147483650" r:id="Rb2f96146277a4c1a"/>
-    <p:sldLayoutId xmlns:r="http://schemas.openxmlformats.org/officeDocument/2006/relationships" id="2147483651" r:id="R123c9529061143c0"/>
-    <p:sldLayoutId xmlns:r="http://schemas.openxmlformats.org/officeDocument/2006/relationships" id="2147483652" r:id="R64c0d7a3e3b04dd4"/>
-    <p:sldLayoutId xmlns:r="http://schemas.openxmlformats.org/officeDocument/2006/relationships" id="2147483653" r:id="R2e87b66af58d4aad"/>
-    <p:sldLayoutId xmlns:r="http://schemas.openxmlformats.org/officeDocument/2006/relationships" id="2147483654" r:id="R1d637294cdd44caf"/>
-    <p:sldLayoutId xmlns:r="http://schemas.openxmlformats.org/officeDocument/2006/relationships" id="2147483655" r:id="R2bb395a484574f5b"/>
-    <p:sldLayoutId xmlns:r="http://schemas.openxmlformats.org/officeDocument/2006/relationships" id="2147483656" r:id="R5ac30d5c2cc54385"/>
-    <p:sldLayoutId xmlns:r="http://schemas.openxmlformats.org/officeDocument/2006/relationships" id="2147483657" r:id="R78c11ffc1a894024"/>
-    <p:sldLayoutId xmlns:r="http://schemas.openxmlformats.org/officeDocument/2006/relationships" id="2147483658" r:id="R6d7236c306df4bfc"/>
-    <p:sldLayoutId xmlns:r="http://schemas.openxmlformats.org/officeDocument/2006/relationships" id="2147483659" r:id="R4c6cb3d0d6df4637"/>
-    <p:sldLayoutId xmlns:r="http://schemas.openxmlformats.org/officeDocument/2006/relationships" id="2147483660" r:id="R94bdd73bde32474c"/>
-    <p:sldLayoutId xmlns:r="http://schemas.openxmlformats.org/officeDocument/2006/relationships" id="2147483661" r:id="R524213cb4faf4f90"/>
-    <p:sldLayoutId xmlns:r="http://schemas.openxmlformats.org/officeDocument/2006/relationships" id="2147483662" r:id="R25b721e1f4044c22"/>
-    <p:sldLayoutId xmlns:r="http://schemas.openxmlformats.org/officeDocument/2006/relationships" id="2147483663" r:id="Rac2776345ebc42ab"/>
-    <p:sldLayoutId xmlns:r="http://schemas.openxmlformats.org/officeDocument/2006/relationships" id="2147483664" r:id="R930176a12a854fe9"/>
+    <p:sldLayoutId xmlns:r="http://schemas.openxmlformats.org/officeDocument/2006/relationships" id="2147483649" r:id="Rd94eb2ebebec4429"/>
+    <p:sldLayoutId xmlns:r="http://schemas.openxmlformats.org/officeDocument/2006/relationships" id="2147483650" r:id="R2fd004db76954ba3"/>
+    <p:sldLayoutId xmlns:r="http://schemas.openxmlformats.org/officeDocument/2006/relationships" id="2147483651" r:id="R619eacc45fbc4225"/>
+    <p:sldLayoutId xmlns:r="http://schemas.openxmlformats.org/officeDocument/2006/relationships" id="2147483652" r:id="R6a89afc526a04e47"/>
+    <p:sldLayoutId xmlns:r="http://schemas.openxmlformats.org/officeDocument/2006/relationships" id="2147483653" r:id="R1fdc2f6736394e42"/>
+    <p:sldLayoutId xmlns:r="http://schemas.openxmlformats.org/officeDocument/2006/relationships" id="2147483654" r:id="Rc7b5f7c3035443b7"/>
+    <p:sldLayoutId xmlns:r="http://schemas.openxmlformats.org/officeDocument/2006/relationships" id="2147483655" r:id="Rbe28fcbdbbf24e04"/>
+    <p:sldLayoutId xmlns:r="http://schemas.openxmlformats.org/officeDocument/2006/relationships" id="2147483656" r:id="R03c1ca6c1288495f"/>
+    <p:sldLayoutId xmlns:r="http://schemas.openxmlformats.org/officeDocument/2006/relationships" id="2147483657" r:id="R13217dd9ce0a4128"/>
+    <p:sldLayoutId xmlns:r="http://schemas.openxmlformats.org/officeDocument/2006/relationships" id="2147483658" r:id="R4b6f4a85abec482e"/>
+    <p:sldLayoutId xmlns:r="http://schemas.openxmlformats.org/officeDocument/2006/relationships" id="2147483659" r:id="Rbeab0c02e20a4a80"/>
+    <p:sldLayoutId xmlns:r="http://schemas.openxmlformats.org/officeDocument/2006/relationships" id="2147483660" r:id="R2ac771a9c2004ef0"/>
+    <p:sldLayoutId xmlns:r="http://schemas.openxmlformats.org/officeDocument/2006/relationships" id="2147483661" r:id="R4ad19b80b4a243b3"/>
+    <p:sldLayoutId xmlns:r="http://schemas.openxmlformats.org/officeDocument/2006/relationships" id="2147483662" r:id="R7e816201f6014868"/>
+    <p:sldLayoutId xmlns:r="http://schemas.openxmlformats.org/officeDocument/2006/relationships" id="2147483663" r:id="Rfd170cccff394f1f"/>
+    <p:sldLayoutId xmlns:r="http://schemas.openxmlformats.org/officeDocument/2006/relationships" id="2147483664" r:id="R4825579d1a2a4619"/>
   </p:sldLayoutIdLst>
   <p:hf hdr="0" ftr="0" dt="0"/>
   <p:txStyles>
@@ -27792,7 +27942,7 @@
           <p:nvPr/>
         </p:nvPicPr>
         <p:blipFill rotWithShape="1">
-          <a:blip xmlns:r="http://schemas.openxmlformats.org/officeDocument/2006/relationships" xmlns:a="http://schemas.openxmlformats.org/drawingml/2006/main" r:embed="Re0782dc3bc3f45e3">
+          <a:blip xmlns:r="http://schemas.openxmlformats.org/officeDocument/2006/relationships" xmlns:a="http://schemas.openxmlformats.org/drawingml/2006/main" r:embed="R5d7e481502884c6a">
             <a:alphaModFix/>
           </a:blip>
           <a:srcRect xmlns:a="http://schemas.openxmlformats.org/drawingml/2006/main" l="0" t="0" r="0" b="0"/>
@@ -27815,19 +27965,19 @@
   </p:cSld>
   <p:clrMap bg1="lt1" tx1="dk1" bg2="dk2" tx2="lt2" accent1="accent1" accent2="accent2" accent3="accent3" accent4="accent4" accent5="accent5" accent6="accent6" hlink="hlink" folHlink="folHlink"/>
   <p:sldLayoutIdLst>
-    <p:sldLayoutId xmlns:r="http://schemas.openxmlformats.org/officeDocument/2006/relationships" id="2147483666" r:id="Rb8bcd3a0793348c3"/>
-    <p:sldLayoutId xmlns:r="http://schemas.openxmlformats.org/officeDocument/2006/relationships" id="2147483667" r:id="R8ad059756b7248e6"/>
-    <p:sldLayoutId xmlns:r="http://schemas.openxmlformats.org/officeDocument/2006/relationships" id="2147483668" r:id="Rbba842c734a84527"/>
-    <p:sldLayoutId xmlns:r="http://schemas.openxmlformats.org/officeDocument/2006/relationships" id="2147483669" r:id="Rc332e68f085341fa"/>
-    <p:sldLayoutId xmlns:r="http://schemas.openxmlformats.org/officeDocument/2006/relationships" id="2147483670" r:id="R3a8808ce588f4103"/>
-    <p:sldLayoutId xmlns:r="http://schemas.openxmlformats.org/officeDocument/2006/relationships" id="2147483671" r:id="R9e0d3fef2b5b4655"/>
-    <p:sldLayoutId xmlns:r="http://schemas.openxmlformats.org/officeDocument/2006/relationships" id="2147483672" r:id="R18b015becbc5455b"/>
-    <p:sldLayoutId xmlns:r="http://schemas.openxmlformats.org/officeDocument/2006/relationships" id="2147483673" r:id="R6df6f6894757494e"/>
-    <p:sldLayoutId xmlns:r="http://schemas.openxmlformats.org/officeDocument/2006/relationships" id="2147483674" r:id="Rc671669bc8e542d2"/>
-    <p:sldLayoutId xmlns:r="http://schemas.openxmlformats.org/officeDocument/2006/relationships" id="2147483675" r:id="R3b413aec10fa40ea"/>
-    <p:sldLayoutId xmlns:r="http://schemas.openxmlformats.org/officeDocument/2006/relationships" id="2147483676" r:id="R65f0ca55e0ae4ea4"/>
-    <p:sldLayoutId xmlns:r="http://schemas.openxmlformats.org/officeDocument/2006/relationships" id="2147483677" r:id="R9cc5e05c627d460a"/>
-    <p:sldLayoutId xmlns:r="http://schemas.openxmlformats.org/officeDocument/2006/relationships" id="2147483678" r:id="Rcde2a3657ab44fe1"/>
+    <p:sldLayoutId xmlns:r="http://schemas.openxmlformats.org/officeDocument/2006/relationships" id="2147483666" r:id="R273963c16cf84bba"/>
+    <p:sldLayoutId xmlns:r="http://schemas.openxmlformats.org/officeDocument/2006/relationships" id="2147483667" r:id="Re680d59d43374847"/>
+    <p:sldLayoutId xmlns:r="http://schemas.openxmlformats.org/officeDocument/2006/relationships" id="2147483668" r:id="R067d257004234094"/>
+    <p:sldLayoutId xmlns:r="http://schemas.openxmlformats.org/officeDocument/2006/relationships" id="2147483669" r:id="Rab1403a000d04b79"/>
+    <p:sldLayoutId xmlns:r="http://schemas.openxmlformats.org/officeDocument/2006/relationships" id="2147483670" r:id="Rae52683f8fee44f3"/>
+    <p:sldLayoutId xmlns:r="http://schemas.openxmlformats.org/officeDocument/2006/relationships" id="2147483671" r:id="Rb79d7d5d10d94ff8"/>
+    <p:sldLayoutId xmlns:r="http://schemas.openxmlformats.org/officeDocument/2006/relationships" id="2147483672" r:id="Rfd945c3710424afa"/>
+    <p:sldLayoutId xmlns:r="http://schemas.openxmlformats.org/officeDocument/2006/relationships" id="2147483673" r:id="Ra94ad5ec0df64055"/>
+    <p:sldLayoutId xmlns:r="http://schemas.openxmlformats.org/officeDocument/2006/relationships" id="2147483674" r:id="Rc9fd8df03f664d62"/>
+    <p:sldLayoutId xmlns:r="http://schemas.openxmlformats.org/officeDocument/2006/relationships" id="2147483675" r:id="R22320878ed914a29"/>
+    <p:sldLayoutId xmlns:r="http://schemas.openxmlformats.org/officeDocument/2006/relationships" id="2147483676" r:id="Rc923f9904ca74dc1"/>
+    <p:sldLayoutId xmlns:r="http://schemas.openxmlformats.org/officeDocument/2006/relationships" id="2147483677" r:id="R1fc9f57d93384656"/>
+    <p:sldLayoutId xmlns:r="http://schemas.openxmlformats.org/officeDocument/2006/relationships" id="2147483678" r:id="R99b5caa4f4264e65"/>
   </p:sldLayoutIdLst>
   <p:hf hdr="0" ftr="0" dt="0"/>
   <p:txStyles>
